--- a/docs/Biztective_Alternate_Futures_Deck.pptx
+++ b/docs/Biztective_Alternate_Futures_Deck.pptx
@@ -15,6 +15,7 @@
     <p:sldId id="263" r:id="rId10"/>
     <p:sldId id="264" r:id="rId11"/>
     <p:sldId id="265" r:id="rId12"/>
+    <p:sldId id="266" r:id="rId13"/>
   </p:sldIdLst>
   <p:sldSz cx="12192000" cy="6858000" type="screen16x9"/>
   <p:notesSz cx="6858000" cy="12192000"/>
@@ -208,7 +209,7 @@
         <p:spPr>
           <a:xfrm>
             <a:off x="640000" y="280000"/>
-            <a:ext cx="6800000" cy="420000"/>
+            <a:ext cx="7200000" cy="420000"/>
           </a:xfrm>
           <a:prstGeom prst="rect">
             <a:avLst/>
@@ -238,7 +239,7 @@
                 <a:latin typeface="JetBrains Mono"/>
                 <a:cs typeface="JetBrains Mono"/>
               </a:rPr>
-              <a:t>ALTERNATE FUTURES  ·  BIZTECTIVE (ROOT 2.0) · PRODUCTION DEPLOYMENT</a:t>
+              <a:t>ALTERNATE FUTURES  ·  BIZTECTIVE (ROOT 2.0) · PHASES 1–12 COMPLETE</a:t>
             </a:r>
           </a:p>
         </p:txBody>
@@ -374,7 +375,7 @@
                 <a:latin typeface="Instrument Serif"/>
                 <a:cs typeface="Instrument Serif"/>
               </a:rPr>
-              <a:t>"Deterministic financial root-cause investigation and verified recovery on decentralized cloud infrastructure."</a:t>
+              <a:t>"Dual-source financial root-cause investigation and verified operational recovery on decentralized cloud infrastructure."</a:t>
             </a:r>
           </a:p>
           <a:p>
@@ -394,7 +395,7 @@
                 <a:latin typeface="Instrument Sans"/>
                 <a:cs typeface="Instrument Sans"/>
               </a:rPr>
-              <a:t>No LLM math fabrication. Every claim cites dataset source rows. Every external spreadsheet write is owner-approved and verified by read-back.</a:t>
+              <a:t>Onboard via 4-file CSV upload or read-only PostgreSQL connector (AMD-24). Zero LLM math fabrication. Every claim cites source rows, and every Google Sheets write is owner-approved and verified by cell-by-cell read-back.</a:t>
             </a:r>
           </a:p>
         </p:txBody>
@@ -444,7 +445,7 @@
                 <a:latin typeface="JetBrains Mono"/>
                 <a:cs typeface="JetBrains Mono"/>
               </a:rPr>
-              <a:t>LIVE FRONTEND (NEXT.JS 16)</a:t>
+              <a:t>LIVE FRONTEND (NEXT.JS 16 · v1.0.3)</a:t>
             </a:r>
           </a:p>
           <a:p>
@@ -484,7 +485,7 @@
                 <a:latin typeface="Instrument Sans"/>
                 <a:cs typeface="Instrument Sans"/>
               </a:rPr>
-              <a:t>Service: root-web · DSEQ 29100447 · UID 10001</a:t>
+              <a:t>Service: root-web · DSEQ 29100447 · CSV + Postgres UI</a:t>
             </a:r>
           </a:p>
         </p:txBody>
@@ -574,7 +575,7 @@
                 <a:latin typeface="Instrument Sans"/>
                 <a:cs typeface="Instrument Sans"/>
               </a:rPr>
-              <a:t>Service: root-api · DSEQ 29100292 · UID 10001</a:t>
+              <a:t>Service: root-api · DSEQ 29100292 · Alembic 0008 Head</a:t>
             </a:r>
           </a:p>
         </p:txBody>
@@ -624,7 +625,7 @@
                 <a:latin typeface="JetBrains Mono"/>
                 <a:cs typeface="JetBrains Mono"/>
               </a:rPr>
-              <a:t>VERIFIED QUALITY &amp; SECURITY GATES</a:t>
+              <a:t>DUAL-SOURCE &amp; QUALITY GATES</a:t>
             </a:r>
           </a:p>
           <a:p>
@@ -644,7 +645,7 @@
                 <a:latin typeface="JetBrains Mono"/>
                 <a:cs typeface="JetBrains Mono"/>
               </a:rPr>
-              <a:t>786 Pytest · 57 Vitest · 17 Playwright E2E</a:t>
+              <a:t>CSV Upload + Read-Only PostgreSQL</a:t>
             </a:r>
           </a:p>
           <a:p>
@@ -664,7 +665,7 @@
                 <a:latin typeface="Instrument Sans"/>
                 <a:cs typeface="Instrument Sans"/>
               </a:rPr>
-              <a:t>96% Backend Cov · WCAG 2.2 AA · 0 CVEs</a:t>
+              <a:t>786+22 Pytest · 67 Vitest · 17 Playwright E2E · 23 RLS Tables</a:t>
             </a:r>
           </a:p>
         </p:txBody>
@@ -678,7 +679,7 @@
         <p:spPr>
           <a:xfrm>
             <a:off x="640000" y="6380000"/>
-            <a:ext cx="8000000" cy="320000"/>
+            <a:ext cx="8200000" cy="320000"/>
           </a:xfrm>
           <a:prstGeom prst="rect">
             <a:avLst/>
@@ -708,7 +709,7 @@
                 <a:latin typeface="JetBrains Mono"/>
                 <a:cs typeface="JetBrains Mono"/>
               </a:rPr>
-              <a:t>Biztective (ROOT 2.0)  ·  Clouds by Alternate Futures  ·  https://root-web-app.alternatefutures.ai</a:t>
+              <a:t>Biztective (ROOT 2.0)  ·  Phases 1–12  ·  Clouds by Alternate Futures  ·  https://root-web-app.alternatefutures.ai</a:t>
             </a:r>
           </a:p>
         </p:txBody>
@@ -752,7 +753,7 @@
                 <a:latin typeface="JetBrains Mono"/>
                 <a:cs typeface="JetBrains Mono"/>
               </a:rPr>
-              <a:t>SLIDE 01 / 10</a:t>
+              <a:t>SLIDE 01 / 11</a:t>
             </a:r>
           </a:p>
         </p:txBody>
@@ -766,6 +767,583 @@
 </file>
 
 <file path=ppt/slides/slide10.xml><?xml version="1.0" encoding="utf-8"?>
+<p:sld xmlns:a="http://schemas.openxmlformats.org/drawingml/2006/main" xmlns:r="http://schemas.openxmlformats.org/officeDocument/2006/relationships" xmlns:p="http://schemas.openxmlformats.org/presentationml/2006/main">
+  <p:cSld>
+    <p:bg>
+      <p:bgPr>
+        <a:solidFill>
+          <a:srgbClr val="F9F5EE"/>
+        </a:solidFill>
+        <a:effectLst/>
+      </p:bgPr>
+    </p:bg>
+    <p:spTree>
+      <p:nvGrpSpPr>
+        <p:cNvPr id="1" name=""/>
+        <p:cNvGrpSpPr/>
+        <p:nvPr/>
+      </p:nvGrpSpPr>
+      <p:grpSpPr>
+        <a:xfrm>
+          <a:off x="0" y="0"/>
+          <a:ext cx="0" cy="0"/>
+          <a:chOff x="0" y="0"/>
+          <a:chExt cx="0" cy="0"/>
+        </a:xfrm>
+      </p:grpSpPr>
+      <p:sp>
+        <p:nvSpPr>
+          <p:cNvPr id="2" name="AF Star 2"/>
+          <p:cNvSpPr/>
+          <p:nvPr/>
+        </p:nvSpPr>
+        <p:spPr>
+          <a:xfrm>
+            <a:off x="10600000" y="1000000"/>
+            <a:ext cx="420000" cy="420000"/>
+          </a:xfrm>
+          <a:prstGeom prst="star4">
+            <a:avLst>
+              <a:gd name="adj" fmla="val 18000"/>
+            </a:avLst>
+          </a:prstGeom>
+          <a:solidFill>
+            <a:srgbClr val="000AFF">
+              <a:alpha val="12000"/>
+            </a:srgbClr>
+          </a:solidFill>
+          <a:ln>
+            <a:noFill/>
+          </a:ln>
+        </p:spPr>
+      </p:sp>
+      <p:sp>
+        <p:nvSpPr>
+          <p:cNvPr id="3" name="AF Star 3"/>
+          <p:cNvSpPr/>
+          <p:nvPr/>
+        </p:nvSpPr>
+        <p:spPr>
+          <a:xfrm>
+            <a:off x="9800000" y="4900000"/>
+            <a:ext cx="220000" cy="220000"/>
+          </a:xfrm>
+          <a:prstGeom prst="star4">
+            <a:avLst>
+              <a:gd name="adj" fmla="val 18000"/>
+            </a:avLst>
+          </a:prstGeom>
+          <a:solidFill>
+            <a:srgbClr val="BE4200">
+              <a:alpha val="14000"/>
+            </a:srgbClr>
+          </a:solidFill>
+          <a:ln>
+            <a:noFill/>
+          </a:ln>
+        </p:spPr>
+      </p:sp>
+      <p:sp>
+        <p:nvSpPr>
+          <p:cNvPr id="4" name="AF Ring 4"/>
+          <p:cNvSpPr/>
+          <p:nvPr/>
+        </p:nvSpPr>
+        <p:spPr>
+          <a:xfrm>
+            <a:off x="-400000" y="4900000"/>
+            <a:ext cx="1800000" cy="1800000"/>
+          </a:xfrm>
+          <a:prstGeom prst="ellipse">
+            <a:avLst/>
+          </a:prstGeom>
+          <a:noFill/>
+          <a:ln w="38100">
+            <a:solidFill>
+              <a:srgbClr val="000AFF">
+                <a:alpha val="12000"/>
+              </a:srgbClr>
+            </a:solidFill>
+          </a:ln>
+        </p:spPr>
+      </p:sp>
+      <p:sp>
+        <p:nvSpPr>
+          <p:cNvPr id="5" name="TextBox 5"/>
+          <p:cNvSpPr txBox="1"/>
+          <p:nvPr/>
+        </p:nvSpPr>
+        <p:spPr>
+          <a:xfrm>
+            <a:off x="640000" y="280000"/>
+            <a:ext cx="7200000" cy="420000"/>
+          </a:xfrm>
+          <a:prstGeom prst="rect">
+            <a:avLst/>
+          </a:prstGeom>
+          <a:noFill/>
+          <a:ln>
+            <a:noFill/>
+          </a:ln>
+        </p:spPr>
+        <p:txBody>
+          <a:bodyPr wrap="square" lIns="0" tIns="0" rIns="0" bIns="0"/>
+          <a:lstStyle/>
+          <a:p>
+            <a:pPr algn="l">
+              <a:lnSpc>
+                <a:spcPct val="120000"/>
+              </a:lnSpc>
+              <a:spcAft>
+                <a:spcPts val="400"/>
+              </a:spcAft>
+            </a:pPr>
+            <a:r>
+              <a:rPr lang="en-US" sz="1100" b="1" i="0" dirty="0">
+                <a:solidFill>
+                  <a:srgbClr val="000AFF"/>
+                </a:solidFill>
+                <a:latin typeface="JetBrains Mono"/>
+                <a:cs typeface="JetBrains Mono"/>
+              </a:rPr>
+              <a:t>ALTERNATE FUTURES  ·  09 · DAY-2 OPERATIONS WITH ACC &amp; KNOWN LIMITATIONS</a:t>
+            </a:r>
+          </a:p>
+        </p:txBody>
+      </p:sp>
+      <p:sp>
+        <p:nvSpPr>
+          <p:cNvPr id="6" name="TextBox 6"/>
+          <p:cNvSpPr txBox="1"/>
+          <p:nvPr/>
+        </p:nvSpPr>
+        <p:spPr>
+          <a:xfrm>
+            <a:off x="8200000" y="260000"/>
+            <a:ext cx="3350000" cy="380000"/>
+          </a:xfrm>
+          <a:prstGeom prst="roundRect">
+            <a:avLst>
+              <a:gd name="adj" fmla="val 16000"/>
+            </a:avLst>
+          </a:prstGeom>
+          <a:solidFill>
+            <a:srgbClr val="000AFF"/>
+          </a:solidFill>
+          <a:ln>
+            <a:noFill/>
+          </a:ln>
+        </p:spPr>
+        <p:txBody>
+          <a:bodyPr wrap="square" lIns="110000" tIns="70000" rIns="110000" bIns="70000"/>
+          <a:lstStyle/>
+          <a:p>
+            <a:pPr algn="l">
+              <a:lnSpc>
+                <a:spcPct val="120000"/>
+              </a:lnSpc>
+              <a:spcAft>
+                <a:spcPts val="400"/>
+              </a:spcAft>
+            </a:pPr>
+            <a:r>
+              <a:rPr lang="en-US" sz="1000" b="1" i="0" dirty="0">
+                <a:solidFill>
+                  <a:srgbClr val="FFFFFF"/>
+                </a:solidFill>
+                <a:latin typeface="JetBrains Mono"/>
+                <a:cs typeface="JetBrains Mono"/>
+              </a:rPr>
+              <a:t>docs/DEPLOYMENT_GUIDE.md</a:t>
+            </a:r>
+          </a:p>
+        </p:txBody>
+      </p:sp>
+      <p:sp>
+        <p:nvSpPr>
+          <p:cNvPr id="7" name="Rect 7"/>
+          <p:cNvSpPr/>
+          <p:nvPr/>
+        </p:nvSpPr>
+        <p:spPr>
+          <a:xfrm>
+            <a:off x="640000" y="740000"/>
+            <a:ext cx="10912000" cy="12700"/>
+          </a:xfrm>
+          <a:prstGeom prst="rect">
+            <a:avLst/>
+          </a:prstGeom>
+          <a:solidFill>
+            <a:srgbClr val="000AFF">
+              <a:alpha val="22000"/>
+            </a:srgbClr>
+          </a:solidFill>
+          <a:ln>
+            <a:noFill/>
+          </a:ln>
+        </p:spPr>
+      </p:sp>
+      <p:sp>
+        <p:nvSpPr>
+          <p:cNvPr id="8" name="TextBox 8"/>
+          <p:cNvSpPr txBox="1"/>
+          <p:nvPr/>
+        </p:nvSpPr>
+        <p:spPr>
+          <a:xfrm>
+            <a:off x="640000" y="900000"/>
+            <a:ext cx="5300000" cy="5200000"/>
+          </a:xfrm>
+          <a:prstGeom prst="roundRect">
+            <a:avLst>
+              <a:gd name="adj" fmla="val 8000"/>
+            </a:avLst>
+          </a:prstGeom>
+          <a:solidFill>
+            <a:srgbClr val="0A0A0A"/>
+          </a:solidFill>
+          <a:ln w="15875">
+            <a:solidFill>
+              <a:srgbClr val="A5B2FF"/>
+            </a:solidFill>
+          </a:ln>
+        </p:spPr>
+        <p:txBody>
+          <a:bodyPr wrap="square" lIns="140000" tIns="110000" rIns="140000" bIns="110000"/>
+          <a:lstStyle/>
+          <a:p>
+            <a:pPr algn="l">
+              <a:lnSpc>
+                <a:spcPct val="120000"/>
+              </a:lnSpc>
+              <a:spcAft>
+                <a:spcPts val="400"/>
+              </a:spcAft>
+            </a:pPr>
+            <a:r>
+              <a:rPr lang="en-US" sz="1100" b="1" i="0" dirty="0">
+                <a:solidFill>
+                  <a:srgbClr val="FFC7AA"/>
+                </a:solidFill>
+                <a:latin typeface="JetBrains Mono"/>
+                <a:cs typeface="JetBrains Mono"/>
+              </a:rPr>
+              <a:t>REDEPLOY &amp; ROLLBACK WITH THE ACC CLI</a:t>
+            </a:r>
+          </a:p>
+          <a:p>
+            <a:pPr algn="l">
+              <a:lnSpc>
+                <a:spcPct val="120000"/>
+              </a:lnSpc>
+              <a:spcAft>
+                <a:spcPts val="400"/>
+              </a:spcAft>
+            </a:pPr>
+            <a:r>
+              <a:rPr lang="en-US" sz="1800" b="1" i="0" dirty="0">
+                <a:solidFill>
+                  <a:srgbClr val="F9F5EE"/>
+                </a:solidFill>
+                <a:latin typeface="Instrument Sans"/>
+                <a:cs typeface="Instrument Sans"/>
+              </a:rPr>
+              <a:t>Immutable Image Tags on Clouds</a:t>
+            </a:r>
+          </a:p>
+          <a:p>
+            <a:pPr algn="l">
+              <a:lnSpc>
+                <a:spcPct val="120000"/>
+              </a:lnSpc>
+              <a:spcAft>
+                <a:spcPts val="400"/>
+              </a:spcAft>
+            </a:pPr>
+            <a:r>
+              <a:rPr lang="en-US" sz="1000" b="0" i="0" dirty="0">
+                <a:solidFill>
+                  <a:srgbClr val="F9F5EE"/>
+                </a:solidFill>
+                <a:latin typeface="JetBrains Mono"/>
+                <a:cs typeface="JetBrains Mono"/>
+              </a:rPr>
+              <a:t># Clouds caches image tags on nodes &amp; rejects :latest/:main.
+# Bump version tag (e.g. 1.0.3 -&gt; 1.0.4) on every change:
+acc services deploy cmvbx1b1016uebs1u7l6ge6p7 \
+  --image ttl.sh/root2-mahateer-web-1.0.3:24h -y
+acc services deploy cmvbwfap014pibs1u7pxz2e5k \
+  --image ttl.sh/root2-mahateer-api-1.0.3:24h -y
+# Enable bundled Supabase CA on root-api (1.0.4):
+acc services env set cmvbwfap014pibs1u7pxz2e5k \
+  SOURCE_DB_SSLROOTCERT=/app/app/sources/certs/supabase-prod-ca-2021.crt
+# Instant rollback to previous known-good tag:
+acc services deploy cmvbwfap014pibs1u7pxz2e5k \
+  --image ttl.sh/root2-mahateer-api-1.0.2:24h -y</a:t>
+            </a:r>
+          </a:p>
+        </p:txBody>
+      </p:sp>
+      <p:sp>
+        <p:nvSpPr>
+          <p:cNvPr id="9" name="TextBox 9"/>
+          <p:cNvSpPr txBox="1"/>
+          <p:nvPr/>
+        </p:nvSpPr>
+        <p:spPr>
+          <a:xfrm>
+            <a:off x="6220000" y="900000"/>
+            <a:ext cx="5300000" cy="3450000"/>
+          </a:xfrm>
+          <a:prstGeom prst="roundRect">
+            <a:avLst>
+              <a:gd name="adj" fmla="val 8000"/>
+            </a:avLst>
+          </a:prstGeom>
+          <a:solidFill>
+            <a:srgbClr val="FFFFFF"/>
+          </a:solidFill>
+          <a:ln w="15875">
+            <a:solidFill>
+              <a:srgbClr val="BE4200"/>
+            </a:solidFill>
+          </a:ln>
+        </p:spPr>
+        <p:txBody>
+          <a:bodyPr wrap="square" lIns="140000" tIns="110000" rIns="140000" bIns="110000"/>
+          <a:lstStyle/>
+          <a:p>
+            <a:pPr algn="l">
+              <a:lnSpc>
+                <a:spcPct val="120000"/>
+              </a:lnSpc>
+              <a:spcAft>
+                <a:spcPts val="400"/>
+              </a:spcAft>
+            </a:pPr>
+            <a:r>
+              <a:rPr lang="en-US" sz="1000" b="1" i="0" dirty="0">
+                <a:solidFill>
+                  <a:srgbClr val="BE4200"/>
+                </a:solidFill>
+                <a:latin typeface="JetBrains Mono"/>
+                <a:cs typeface="JetBrains Mono"/>
+              </a:rPr>
+              <a:t>TRANSPARENCY · KNOWN LIMITATIONS (PHASES 11–12)</a:t>
+            </a:r>
+          </a:p>
+          <a:p>
+            <a:pPr algn="l">
+              <a:lnSpc>
+                <a:spcPct val="120000"/>
+              </a:lnSpc>
+              <a:spcAft>
+                <a:spcPts val="400"/>
+              </a:spcAft>
+            </a:pPr>
+            <a:r>
+              <a:rPr lang="en-US" sz="1800" b="1" i="0" dirty="0">
+                <a:solidFill>
+                  <a:srgbClr val="0000AF"/>
+                </a:solidFill>
+                <a:latin typeface="Instrument Sans"/>
+                <a:cs typeface="Instrument Sans"/>
+              </a:rPr>
+              <a:t>Honest Engineering Boundaries</a:t>
+            </a:r>
+          </a:p>
+          <a:p>
+            <a:pPr algn="l">
+              <a:lnSpc>
+                <a:spcPct val="120000"/>
+              </a:lnSpc>
+              <a:spcAft>
+                <a:spcPts val="400"/>
+              </a:spcAft>
+            </a:pPr>
+            <a:r>
+              <a:rPr lang="en-US" sz="1100" b="0" i="0" dirty="0">
+                <a:solidFill>
+                  <a:srgbClr val="1A1A1A"/>
+                </a:solidFill>
+                <a:latin typeface="Instrument Sans"/>
+                <a:cs typeface="Instrument Sans"/>
+              </a:rPr>
+              <a:t>• Phase 12 Sync Scope (AMD-24): Manual 'Sync now' full refresh only — no incremental watermark sync, scheduled sync, or XLSX import.
+• Deployed Supabase CA (1.0.4 Pending): Bundled Supabase root CA is committed on main; deploying 1.0.4 + SOURCE_DB_SSLROOTCERT enables live Clouds → Supabase verify-full sync.
+• Ephemeral OCI Registry (ttl.sh): 24h tags expire after 24 hours; re-run deploy-images.yml before redeploying after 24h.
+• Single-Instance Memory: SEC-20 session token buckets run in-process (--workers 1).</a:t>
+            </a:r>
+          </a:p>
+        </p:txBody>
+      </p:sp>
+      <p:sp>
+        <p:nvSpPr>
+          <p:cNvPr id="10" name="TextBox 10"/>
+          <p:cNvSpPr txBox="1"/>
+          <p:nvPr/>
+        </p:nvSpPr>
+        <p:spPr>
+          <a:xfrm>
+            <a:off x="6220000" y="4500000"/>
+            <a:ext cx="5300000" cy="1600000"/>
+          </a:xfrm>
+          <a:prstGeom prst="roundRect">
+            <a:avLst>
+              <a:gd name="adj" fmla="val 8000"/>
+            </a:avLst>
+          </a:prstGeom>
+          <a:solidFill>
+            <a:srgbClr val="C8E0E4"/>
+          </a:solidFill>
+          <a:ln w="15875">
+            <a:solidFill>
+              <a:srgbClr val="000AFF"/>
+            </a:solidFill>
+          </a:ln>
+        </p:spPr>
+        <p:txBody>
+          <a:bodyPr wrap="square" lIns="140000" tIns="110000" rIns="140000" bIns="110000"/>
+          <a:lstStyle/>
+          <a:p>
+            <a:pPr algn="l">
+              <a:lnSpc>
+                <a:spcPct val="120000"/>
+              </a:lnSpc>
+              <a:spcAft>
+                <a:spcPts val="400"/>
+              </a:spcAft>
+            </a:pPr>
+            <a:r>
+              <a:rPr lang="en-US" sz="1000" b="1" i="0" dirty="0">
+                <a:solidFill>
+                  <a:srgbClr val="0000AF"/>
+                </a:solidFill>
+                <a:latin typeface="JetBrains Mono"/>
+                <a:cs typeface="JetBrains Mono"/>
+              </a:rPr>
+              <a:t>SAFE SCHEMA ROLLBACK CONTRACT (R-14)</a:t>
+            </a:r>
+          </a:p>
+          <a:p>
+            <a:pPr algn="l">
+              <a:lnSpc>
+                <a:spcPct val="120000"/>
+              </a:lnSpc>
+              <a:spcAft>
+                <a:spcPts val="400"/>
+              </a:spcAft>
+            </a:pPr>
+            <a:r>
+              <a:rPr lang="en-US" sz="1100" b="0" i="0" dirty="0">
+                <a:solidFill>
+                  <a:srgbClr val="1A1A1A"/>
+                </a:solidFill>
+                <a:latin typeface="Instrument Sans"/>
+                <a:cs typeface="Instrument Sans"/>
+              </a:rPr>
+              <a:t>Container image rollbacks do not auto-downgrade PostgreSQL. All Alembic migrations (0001..0008) follow expand → migrate → contract so previous image tags stay compatible with the live schema.</a:t>
+            </a:r>
+          </a:p>
+        </p:txBody>
+      </p:sp>
+      <p:sp>
+        <p:nvSpPr>
+          <p:cNvPr id="11" name="TextBox 11"/>
+          <p:cNvSpPr txBox="1"/>
+          <p:nvPr/>
+        </p:nvSpPr>
+        <p:spPr>
+          <a:xfrm>
+            <a:off x="640000" y="6380000"/>
+            <a:ext cx="8200000" cy="320000"/>
+          </a:xfrm>
+          <a:prstGeom prst="rect">
+            <a:avLst/>
+          </a:prstGeom>
+          <a:noFill/>
+          <a:ln>
+            <a:noFill/>
+          </a:ln>
+        </p:spPr>
+        <p:txBody>
+          <a:bodyPr wrap="square" lIns="0" tIns="0" rIns="0" bIns="0"/>
+          <a:lstStyle/>
+          <a:p>
+            <a:pPr algn="l">
+              <a:lnSpc>
+                <a:spcPct val="120000"/>
+              </a:lnSpc>
+              <a:spcAft>
+                <a:spcPts val="400"/>
+              </a:spcAft>
+            </a:pPr>
+            <a:r>
+              <a:rPr lang="en-US" sz="900" b="0" i="0" dirty="0">
+                <a:solidFill>
+                  <a:srgbClr val="0000AF"/>
+                </a:solidFill>
+                <a:latin typeface="JetBrains Mono"/>
+                <a:cs typeface="JetBrains Mono"/>
+              </a:rPr>
+              <a:t>Biztective (ROOT 2.0)  ·  Phases 1–12  ·  Clouds by Alternate Futures  ·  https://root-web-app.alternatefutures.ai</a:t>
+            </a:r>
+          </a:p>
+        </p:txBody>
+      </p:sp>
+      <p:sp>
+        <p:nvSpPr>
+          <p:cNvPr id="12" name="TextBox 12"/>
+          <p:cNvSpPr txBox="1"/>
+          <p:nvPr/>
+        </p:nvSpPr>
+        <p:spPr>
+          <a:xfrm>
+            <a:off x="10400000" y="6380000"/>
+            <a:ext cx="1152000" cy="320000"/>
+          </a:xfrm>
+          <a:prstGeom prst="rect">
+            <a:avLst/>
+          </a:prstGeom>
+          <a:noFill/>
+          <a:ln>
+            <a:noFill/>
+          </a:ln>
+        </p:spPr>
+        <p:txBody>
+          <a:bodyPr wrap="square" lIns="0" tIns="0" rIns="0" bIns="0"/>
+          <a:lstStyle/>
+          <a:p>
+            <a:pPr algn="l">
+              <a:lnSpc>
+                <a:spcPct val="120000"/>
+              </a:lnSpc>
+              <a:spcAft>
+                <a:spcPts val="400"/>
+              </a:spcAft>
+            </a:pPr>
+            <a:r>
+              <a:rPr lang="en-US" sz="900" b="1" i="0" dirty="0">
+                <a:solidFill>
+                  <a:srgbClr val="0000AF"/>
+                </a:solidFill>
+                <a:latin typeface="JetBrains Mono"/>
+                <a:cs typeface="JetBrains Mono"/>
+              </a:rPr>
+              <a:t>SLIDE 10 / 11</a:t>
+            </a:r>
+          </a:p>
+        </p:txBody>
+      </p:sp>
+    </p:spTree>
+  </p:cSld>
+  <p:clrMapOvr>
+    <a:masterClrMapping/>
+  </p:clrMapOvr>
+</p:sld>
+</file>
+
+<file path=ppt/slides/slide11.xml><?xml version="1.0" encoding="utf-8"?>
 <p:sld xmlns:a="http://schemas.openxmlformats.org/drawingml/2006/main" xmlns:r="http://schemas.openxmlformats.org/officeDocument/2006/relationships" xmlns:p="http://schemas.openxmlformats.org/presentationml/2006/main">
   <p:cSld>
     <p:bg>
@@ -901,7 +1479,7 @@
         <p:spPr>
           <a:xfrm>
             <a:off x="640000" y="280000"/>
-            <a:ext cx="6800000" cy="420000"/>
+            <a:ext cx="7200000" cy="420000"/>
           </a:xfrm>
           <a:prstGeom prst="rect">
             <a:avLst/>
@@ -931,7 +1509,7 @@
                 <a:latin typeface="JetBrains Mono"/>
                 <a:cs typeface="JetBrains Mono"/>
               </a:rPr>
-              <a:t>ALTERNATE FUTURES  ·  09 · VERIFY THE LIVE DEPLOYMENT NOW</a:t>
+              <a:t>ALTERNATE FUTURES  ·  10 · LIVE DEMO JOURNEY &amp; VERIFICATION</a:t>
             </a:r>
           </a:p>
         </p:txBody>
@@ -1016,8 +1594,8 @@
         </p:nvSpPr>
         <p:spPr>
           <a:xfrm>
-            <a:off x="640000" y="980000"/>
-            <a:ext cx="10600000" cy="1800000"/>
+            <a:off x="640000" y="950000"/>
+            <a:ext cx="10600000" cy="1750000"/>
           </a:xfrm>
           <a:prstGeom prst="rect">
             <a:avLst/>
@@ -1067,7 +1645,7 @@
                 <a:latin typeface="Instrument Serif"/>
                 <a:cs typeface="Instrument Serif"/>
               </a:rPr>
-              <a:t>"Infrastructure that flows, not locks — paired with financial root-cause analysis you can audit down to the row."</a:t>
+              <a:t>"Infrastructure that flows, not locks — paired with dual-source financial root-cause analysis you can audit down to the row."</a:t>
             </a:r>
           </a:p>
         </p:txBody>
@@ -1080,8 +1658,8 @@
         </p:nvSpPr>
         <p:spPr>
           <a:xfrm>
-            <a:off x="640000" y="2850000"/>
-            <a:ext cx="10880000" cy="1550000"/>
+            <a:off x="640000" y="2800000"/>
+            <a:ext cx="10880000" cy="1650000"/>
           </a:xfrm>
           <a:prstGeom prst="roundRect">
             <a:avLst>
@@ -1117,7 +1695,7 @@
                 <a:latin typeface="JetBrains Mono"/>
                 <a:cs typeface="JetBrains Mono"/>
               </a:rPr>
-              <a:t># Verify live readiness &amp; PostgreSQL RLS role invariants:</a:t>
+              <a:t># 6-Minute Demo Flow: Sign In -&gt; Dual Onboarding (CSV or Postgres demo_shop) -&gt; Investigate -&gt; Replay v1/v2 -&gt; Plan -&gt; Verified Sheets Write</a:t>
             </a:r>
           </a:p>
           <a:p>
@@ -1137,7 +1715,7 @@
                 <a:latin typeface="JetBrains Mono"/>
                 <a:cs typeface="JetBrains Mono"/>
               </a:rPr>
-              <a:t>curl -sS https://root-web-app.alternatefutures.ai/api/v1/readyz   # -&gt; {"status":"ready"}</a:t>
+              <a:t>curl -sS https://root-web-app.alternatefutures.ai/api/v1/readyz   # -&gt; {"status":"ready"} (Alembic 0008 + 23 RLS tables)</a:t>
             </a:r>
           </a:p>
           <a:p>
@@ -1227,7 +1805,7 @@
                 <a:latin typeface="JetBrains Mono"/>
                 <a:cs typeface="JetBrains Mono"/>
               </a:rPr>
-              <a:t>PUBLIC WEB APP</a:t>
+              <a:t>PUBLIC WEB APP (v1.0.3)</a:t>
             </a:r>
           </a:p>
           <a:p>
@@ -1367,7 +1945,7 @@
                 <a:latin typeface="JetBrains Mono"/>
                 <a:cs typeface="JetBrains Mono"/>
               </a:rPr>
-              <a:t>DEPLOYMENT RUNBOOK</a:t>
+              <a:t>DOCS &amp; TEST PACK</a:t>
             </a:r>
           </a:p>
           <a:p>
@@ -1387,7 +1965,7 @@
                 <a:latin typeface="JetBrains Mono"/>
                 <a:cs typeface="JetBrains Mono"/>
               </a:rPr>
-              <a:t>docs/DEPLOYMENT_GUIDE.md · AMD-22</a:t>
+              <a:t>docs/DEPLOYMENT_GUIDE.md · test-data/ (AMD-24)</a:t>
             </a:r>
           </a:p>
         </p:txBody>
@@ -1401,7 +1979,7 @@
         <p:spPr>
           <a:xfrm>
             <a:off x="640000" y="6380000"/>
-            <a:ext cx="8000000" cy="320000"/>
+            <a:ext cx="8200000" cy="320000"/>
           </a:xfrm>
           <a:prstGeom prst="rect">
             <a:avLst/>
@@ -1431,7 +2009,7 @@
                 <a:latin typeface="JetBrains Mono"/>
                 <a:cs typeface="JetBrains Mono"/>
               </a:rPr>
-              <a:t>Biztective (ROOT 2.0)  ·  Clouds by Alternate Futures  ·  https://root-web-app.alternatefutures.ai</a:t>
+              <a:t>Biztective (ROOT 2.0)  ·  Phases 1–12  ·  Clouds by Alternate Futures  ·  https://root-web-app.alternatefutures.ai</a:t>
             </a:r>
           </a:p>
         </p:txBody>
@@ -1475,7 +2053,7 @@
                 <a:latin typeface="JetBrains Mono"/>
                 <a:cs typeface="JetBrains Mono"/>
               </a:rPr>
-              <a:t>SLIDE 10 / 10</a:t>
+              <a:t>SLIDE 11 / 11</a:t>
             </a:r>
           </a:p>
         </p:txBody>
@@ -1600,7 +2178,7 @@
         <p:spPr>
           <a:xfrm>
             <a:off x="640000" y="280000"/>
-            <a:ext cx="6800000" cy="420000"/>
+            <a:ext cx="7200000" cy="420000"/>
           </a:xfrm>
           <a:prstGeom prst="rect">
             <a:avLst/>
@@ -1856,7 +2434,7 @@
                 <a:latin typeface="Instrument Sans"/>
                 <a:cs typeface="Instrument Sans"/>
               </a:rPr>
-              <a:t>Raw LLMs over CSVs fabricate revenue deltas, miscount restockable COGS on returns, and change answers between runs.
+              <a:t>Raw LLMs over CSVs or databases fabricate revenue deltas, miscount restockable COGS on returns, and change answers between runs.
 Fix: Deterministic SQL + Python Decimal modules compute every number.</a:t>
             </a:r>
           </a:p>
@@ -2038,7 +2616,7 @@
                 <a:latin typeface="Instrument Sans"/>
                 <a:cs typeface="Instrument Sans"/>
               </a:rPr>
-              <a:t>Giving an LLM direct write tools risks unapproved customer contact, spreadsheet formula injection, or duplicate rows.
+              <a:t>Giving an LLM direct database or spreadsheet write tools risks unapproved customer contact, formula injection, or duplicate rows.
 Fix: Zero LLM write tools; owner approves a SHA-256 plan hash.</a:t>
             </a:r>
           </a:p>
@@ -2103,7 +2681,7 @@
         <p:spPr>
           <a:xfrm>
             <a:off x="640000" y="6380000"/>
-            <a:ext cx="8000000" cy="320000"/>
+            <a:ext cx="8200000" cy="320000"/>
           </a:xfrm>
           <a:prstGeom prst="rect">
             <a:avLst/>
@@ -2133,7 +2711,7 @@
                 <a:latin typeface="JetBrains Mono"/>
                 <a:cs typeface="JetBrains Mono"/>
               </a:rPr>
-              <a:t>Biztective (ROOT 2.0)  ·  Clouds by Alternate Futures  ·  https://root-web-app.alternatefutures.ai</a:t>
+              <a:t>Biztective (ROOT 2.0)  ·  Phases 1–12  ·  Clouds by Alternate Futures  ·  https://root-web-app.alternatefutures.ai</a:t>
             </a:r>
           </a:p>
         </p:txBody>
@@ -2177,7 +2755,7 @@
                 <a:latin typeface="JetBrains Mono"/>
                 <a:cs typeface="JetBrains Mono"/>
               </a:rPr>
-              <a:t>SLIDE 02 / 10</a:t>
+              <a:t>SLIDE 02 / 11</a:t>
             </a:r>
           </a:p>
         </p:txBody>
@@ -2300,7 +2878,7 @@
         <p:spPr>
           <a:xfrm>
             <a:off x="640000" y="280000"/>
-            <a:ext cx="6800000" cy="420000"/>
+            <a:ext cx="7200000" cy="420000"/>
           </a:xfrm>
           <a:prstGeom prst="rect">
             <a:avLst/>
@@ -2378,7 +2956,7 @@
                 <a:latin typeface="JetBrains Mono"/>
                 <a:cs typeface="JetBrains Mono"/>
               </a:rPr>
-              <a:t>Strict Deterministic Boundaries</a:t>
+              <a:t>Shared Canonical Engine</a:t>
             </a:r>
           </a:p>
         </p:txBody>
@@ -2439,14 +3017,14 @@
               </a:spcAft>
             </a:pPr>
             <a:r>
-              <a:rPr lang="en-US" sz="2600" b="1" i="0" dirty="0">
+              <a:rPr lang="en-US" sz="2500" b="1" i="0" dirty="0">
                 <a:solidFill>
                   <a:srgbClr val="0000AF"/>
                 </a:solidFill>
                 <a:latin typeface="Instrument Sans"/>
                 <a:cs typeface="Instrument Sans"/>
               </a:rPr>
-              <a:t>How Biztective Turns Raw CSVs into Verified Operational Recovery</a:t>
+              <a:t>Dual-Source Onboarding Into One Deterministic Investigation &amp; Recovery Pipeline</a:t>
             </a:r>
           </a:p>
         </p:txBody>
@@ -2496,7 +3074,7 @@
                 <a:latin typeface="JetBrains Mono"/>
                 <a:cs typeface="JetBrains Mono"/>
               </a:rPr>
-              <a:t>LAYER 1 · INGESTION</a:t>
+              <a:t>LAYER 1 · DUAL ONBOARDING</a:t>
             </a:r>
           </a:p>
           <a:p>
@@ -2516,7 +3094,7 @@
                 <a:latin typeface="Instrument Sans"/>
                 <a:cs typeface="Instrument Sans"/>
               </a:rPr>
-              <a:t>Hygiene &amp; Quarantine</a:t>
+              <a:t>CSV Upload &amp; Read-Only DB</a:t>
             </a:r>
           </a:p>
           <a:p>
@@ -2536,9 +3114,9 @@
                 <a:latin typeface="Instrument Sans"/>
                 <a:cs typeface="Instrument Sans"/>
               </a:rPr>
-              <a:t>• Streaming CSV validation (&lt;=50 MB, &lt;=500k rows across orders, products, customers, returns).
-• Quarantines V-001..V-022 defects.
-• Strips PII (SEC-08) &amp; neutralizes = + - @ formulas (SEC-09).</a:t>
+              <a:t>• 4-file CSV upload OR read-only PostgreSQL extraction (AMD-24).
+• Both enter inspect_file → create_dataset (&lt;=50 MB, &lt;=500k rows).
+• Quarantines V-001..V-022 defects, strips PII (SEC-08) &amp; =+-@ formulas.</a:t>
             </a:r>
           </a:p>
         </p:txBody>
@@ -2899,7 +3477,7 @@
         <p:spPr>
           <a:xfrm>
             <a:off x="640000" y="6380000"/>
-            <a:ext cx="8000000" cy="320000"/>
+            <a:ext cx="8200000" cy="320000"/>
           </a:xfrm>
           <a:prstGeom prst="rect">
             <a:avLst/>
@@ -2929,7 +3507,7 @@
                 <a:latin typeface="JetBrains Mono"/>
                 <a:cs typeface="JetBrains Mono"/>
               </a:rPr>
-              <a:t>Biztective (ROOT 2.0)  ·  Clouds by Alternate Futures  ·  https://root-web-app.alternatefutures.ai</a:t>
+              <a:t>Biztective (ROOT 2.0)  ·  Phases 1–12  ·  Clouds by Alternate Futures  ·  https://root-web-app.alternatefutures.ai</a:t>
             </a:r>
           </a:p>
         </p:txBody>
@@ -2973,7 +3551,7 @@
                 <a:latin typeface="JetBrains Mono"/>
                 <a:cs typeface="JetBrains Mono"/>
               </a:rPr>
-              <a:t>SLIDE 03 / 10</a:t>
+              <a:t>SLIDE 03 / 11</a:t>
             </a:r>
           </a:p>
         </p:txBody>
@@ -3019,7 +3597,7 @@
         </p:nvSpPr>
         <p:spPr>
           <a:xfrm>
-            <a:off x="10500000" y="1000000"/>
+            <a:off x="10500000" y="950000"/>
             <a:ext cx="420000" cy="420000"/>
           </a:xfrm>
           <a:prstGeom prst="star4">
@@ -3045,7 +3623,7 @@
         </p:nvSpPr>
         <p:spPr>
           <a:xfrm>
-            <a:off x="11100000" y="2400000"/>
+            <a:off x="11100000" y="2300000"/>
             <a:ext cx="220000" cy="220000"/>
           </a:xfrm>
           <a:prstGeom prst="star4">
@@ -3071,8 +3649,8 @@
         </p:nvSpPr>
         <p:spPr>
           <a:xfrm>
-            <a:off x="900000" y="5200000"/>
-            <a:ext cx="380000" cy="380000"/>
+            <a:off x="850000" y="5200000"/>
+            <a:ext cx="340000" cy="340000"/>
           </a:xfrm>
           <a:prstGeom prst="star4">
             <a:avLst>
@@ -3081,7 +3659,7 @@
           </a:prstGeom>
           <a:solidFill>
             <a:srgbClr val="A5B2FF">
-              <a:alpha val="14000"/>
+              <a:alpha val="15000"/>
             </a:srgbClr>
           </a:solidFill>
           <a:ln>
@@ -3097,8 +3675,8 @@
         </p:nvSpPr>
         <p:spPr>
           <a:xfrm>
-            <a:off x="-500000" y="4800000"/>
-            <a:ext cx="2000000" cy="2000000"/>
+            <a:off x="10300000" y="4800000"/>
+            <a:ext cx="2100000" cy="2100000"/>
           </a:xfrm>
           <a:prstGeom prst="ellipse">
             <a:avLst/>
@@ -3106,7 +3684,7 @@
           <a:noFill/>
           <a:ln w="38100">
             <a:solidFill>
-              <a:srgbClr val="A5B2FF">
+              <a:srgbClr val="FFC7AA">
                 <a:alpha val="15000"/>
               </a:srgbClr>
             </a:solidFill>
@@ -3122,7 +3700,7 @@
         <p:spPr>
           <a:xfrm>
             <a:off x="640000" y="280000"/>
-            <a:ext cx="6800000" cy="420000"/>
+            <a:ext cx="7200000" cy="420000"/>
           </a:xfrm>
           <a:prstGeom prst="rect">
             <a:avLst/>
@@ -3152,7 +3730,7 @@
                 <a:latin typeface="JetBrains Mono"/>
                 <a:cs typeface="JetBrains Mono"/>
               </a:rPr>
-              <a:t>ALTERNATE FUTURES  ·  03 · STATE MACHINE &amp; HUMAN-IN-THE-LOOP</a:t>
+              <a:t>ALTERNATE FUTURES  ·  03 · PHASE 12: DUAL-SOURCE ONBOARDING &amp; POSTGRES CONNECTOR</a:t>
             </a:r>
           </a:p>
         </p:txBody>
@@ -3200,7 +3778,7 @@
                 <a:latin typeface="JetBrains Mono"/>
                 <a:cs typeface="JetBrains Mono"/>
               </a:rPr>
-              <a:t>Durable PostgreSQL Checkpoints</a:t>
+              <a:t>AMD-24 · Migration 0008</a:t>
             </a:r>
           </a:p>
         </p:txBody>
@@ -3237,8 +3815,8 @@
         </p:nvSpPr>
         <p:spPr>
           <a:xfrm>
-            <a:off x="640000" y="920000"/>
-            <a:ext cx="10900000" cy="1100000"/>
+            <a:off x="640000" y="900000"/>
+            <a:ext cx="10900000" cy="1050000"/>
           </a:xfrm>
           <a:prstGeom prst="rect">
             <a:avLst/>
@@ -3261,34 +3839,34 @@
               </a:spcAft>
             </a:pPr>
             <a:r>
-              <a:rPr lang="en-US" sz="2700" b="1" i="0" dirty="0">
+              <a:rPr lang="en-US" sz="2600" b="1" i="0" dirty="0">
                 <a:solidFill>
                   <a:srgbClr val="F9F5EE"/>
                 </a:solidFill>
                 <a:latin typeface="Instrument Sans"/>
                 <a:cs typeface="Instrument Sans"/>
               </a:rPr>
-              <a:t>Ten-Stage Verified Pipeline Across Human &amp; Container Restarts</a:t>
-            </a:r>
-          </a:p>
-          <a:p>
-            <a:pPr algn="l">
-              <a:lnSpc>
-                <a:spcPct val="120000"/>
-              </a:lnSpc>
-              <a:spcAft>
-                <a:spcPts val="400"/>
-              </a:spcAft>
-            </a:pPr>
-            <a:r>
-              <a:rPr lang="en-US" sz="1400" b="1" i="0" dirty="0">
+              <a:t>Read-Only PostgreSQL Business Source &amp; 8-Scenario Product Test Pack</a:t>
+            </a:r>
+          </a:p>
+          <a:p>
+            <a:pPr algn="l">
+              <a:lnSpc>
+                <a:spcPct val="120000"/>
+              </a:lnSpc>
+              <a:spcAft>
+                <a:spcPts val="400"/>
+              </a:spcAft>
+            </a:pPr>
+            <a:r>
+              <a:rPr lang="en-US" sz="1300" b="0" i="0" dirty="0">
                 <a:solidFill>
                   <a:srgbClr val="FFC7AA"/>
                 </a:solidFill>
-                <a:latin typeface="JetBrains Mono"/>
-                <a:cs typeface="JetBrains Mono"/>
-              </a:rPr>
-              <a:t>Upload → Analyze → Detect → Investigate → Clarify → Revise → Plan → Approve → Execute → Verify</a:t>
+                <a:latin typeface="Instrument Sans"/>
+                <a:cs typeface="Instrument Sans"/>
+              </a:rPr>
+              <a:t>Businesses onboard either via 4-file CSV upload or by connecting a read-only PostgreSQL database (/datasets/connect). Both paths feed one canonical pipeline with identical weekly metrics.</a:t>
             </a:r>
           </a:p>
         </p:txBody>
@@ -3301,8 +3879,8 @@
         </p:nvSpPr>
         <p:spPr>
           <a:xfrm>
-            <a:off x="640000" y="2150000"/>
-            <a:ext cx="5300000" cy="2800000"/>
+            <a:off x="640000" y="2050000"/>
+            <a:ext cx="3500000" cy="2850000"/>
           </a:xfrm>
           <a:prstGeom prst="roundRect">
             <a:avLst>
@@ -3331,56 +3909,56 @@
               </a:spcAft>
             </a:pPr>
             <a:r>
-              <a:rPr lang="en-US" sz="1100" b="1" i="0" dirty="0">
-                <a:solidFill>
-                  <a:srgbClr val="A5B2FF"/>
-                </a:solidFill>
-                <a:latin typeface="JetBrains Mono"/>
-                <a:cs typeface="JetBrains Mono"/>
-              </a:rPr>
-              <a:t>INVESTIGATION SUBGRAPH (10 NODES)</a:t>
-            </a:r>
-          </a:p>
-          <a:p>
-            <a:pPr algn="l">
-              <a:lnSpc>
-                <a:spcPct val="120000"/>
-              </a:lnSpc>
-              <a:spcAft>
-                <a:spcPts val="400"/>
-              </a:spcAft>
-            </a:pPr>
-            <a:r>
-              <a:rPr lang="en-US" sz="1800" b="1" i="0" dirty="0">
+              <a:rPr lang="en-US" sz="1000" b="1" i="0" dirty="0">
+                <a:solidFill>
+                  <a:srgbClr val="FFC7AA"/>
+                </a:solidFill>
+                <a:latin typeface="JetBrains Mono"/>
+                <a:cs typeface="JetBrains Mono"/>
+              </a:rPr>
+              <a:t>ZERO STORED PASSWORDS · MIGRATION 0008</a:t>
+            </a:r>
+          </a:p>
+          <a:p>
+            <a:pPr algn="l">
+              <a:lnSpc>
+                <a:spcPct val="120000"/>
+              </a:lnSpc>
+              <a:spcAft>
+                <a:spcPts val="400"/>
+              </a:spcAft>
+            </a:pPr>
+            <a:r>
+              <a:rPr lang="en-US" sz="1700" b="1" i="0" dirty="0">
                 <a:solidFill>
                   <a:srgbClr val="F9F5EE"/>
                 </a:solidFill>
                 <a:latin typeface="Instrument Sans"/>
                 <a:cs typeface="Instrument Sans"/>
               </a:rPr>
-              <a:t>Evidence Gathering → Critic → Clarification</a:t>
-            </a:r>
-          </a:p>
-          <a:p>
-            <a:pPr algn="l">
-              <a:lnSpc>
-                <a:spcPct val="120000"/>
-              </a:lnSpc>
-              <a:spcAft>
-                <a:spcPts val="400"/>
-              </a:spcAft>
-            </a:pPr>
-            <a:r>
-              <a:rPr lang="en-US" sz="1200" b="0" i="0" dirty="0">
+              <a:t>Tenant-Isolated Connections</a:t>
+            </a:r>
+          </a:p>
+          <a:p>
+            <a:pPr algn="l">
+              <a:lnSpc>
+                <a:spcPct val="120000"/>
+              </a:lnSpc>
+              <a:spcAft>
+                <a:spcPts val="400"/>
+              </a:spcAft>
+            </a:pPr>
+            <a:r>
+              <a:rPr lang="en-US" sz="1100" b="0" i="0" dirty="0">
                 <a:solidFill>
                   <a:srgbClr val="F9F5EE"/>
                 </a:solidFill>
                 <a:latin typeface="Instrument Sans"/>
                 <a:cs typeface="Instrument Sans"/>
               </a:rPr>
-              <a:t>• load_context → plan_checks → run_verification executes read-only SQL checks for return spikes and vendor defects.
-• critic → decide_next enforces sample size and time-window rules.
-• ask_human pauses at awaiting_human in langgraph.checkpoints; each owner answer creates an immutable interpretation_versions row (v1 → v2).</a:t>
+              <a:t>• New source_connections table with forced RLS (AMD-3) and NO password column.
+• Passwords are never stored, logged, or returned; each manual Sync Now prompts for the password.
+• datasets tracks source_type ('upload' | 'postgres') &amp; source_connection_id.</a:t>
             </a:r>
           </a:p>
         </p:txBody>
@@ -3393,8 +3971,192 @@
         </p:nvSpPr>
         <p:spPr>
           <a:xfrm>
-            <a:off x="6220000" y="2150000"/>
-            <a:ext cx="5300000" cy="2800000"/>
+            <a:off x="4320000" y="2050000"/>
+            <a:ext cx="3500000" cy="2850000"/>
+          </a:xfrm>
+          <a:prstGeom prst="roundRect">
+            <a:avLst>
+              <a:gd name="adj" fmla="val 8000"/>
+            </a:avLst>
+          </a:prstGeom>
+          <a:solidFill>
+            <a:srgbClr val="0A0A0A"/>
+          </a:solidFill>
+          <a:ln w="15875">
+            <a:solidFill>
+              <a:srgbClr val="A5B2FF"/>
+            </a:solidFill>
+          </a:ln>
+        </p:spPr>
+        <p:txBody>
+          <a:bodyPr wrap="square" lIns="140000" tIns="110000" rIns="140000" bIns="110000"/>
+          <a:lstStyle/>
+          <a:p>
+            <a:pPr algn="l">
+              <a:lnSpc>
+                <a:spcPct val="120000"/>
+              </a:lnSpc>
+              <a:spcAft>
+                <a:spcPts val="400"/>
+              </a:spcAft>
+            </a:pPr>
+            <a:r>
+              <a:rPr lang="en-US" sz="1000" b="1" i="0" dirty="0">
+                <a:solidFill>
+                  <a:srgbClr val="FFC7AA"/>
+                </a:solidFill>
+                <a:latin typeface="JetBrains Mono"/>
+                <a:cs typeface="JetBrains Mono"/>
+              </a:rPr>
+              <a:t>SSRF, TLS &amp; READ-ONLY ENFORCEMENT</a:t>
+            </a:r>
+          </a:p>
+          <a:p>
+            <a:pPr algn="l">
+              <a:lnSpc>
+                <a:spcPct val="120000"/>
+              </a:lnSpc>
+              <a:spcAft>
+                <a:spcPts val="400"/>
+              </a:spcAft>
+            </a:pPr>
+            <a:r>
+              <a:rPr lang="en-US" sz="1700" b="1" i="0" dirty="0">
+                <a:solidFill>
+                  <a:srgbClr val="F9F5EE"/>
+                </a:solidFill>
+                <a:latin typeface="Instrument Sans"/>
+                <a:cs typeface="Instrument Sans"/>
+              </a:rPr>
+              <a:t>Hardened Connector (postgres.py)</a:t>
+            </a:r>
+          </a:p>
+          <a:p>
+            <a:pPr algn="l">
+              <a:lnSpc>
+                <a:spcPct val="120000"/>
+              </a:lnSpc>
+              <a:spcAft>
+                <a:spcPts val="400"/>
+              </a:spcAft>
+            </a:pPr>
+            <a:r>
+              <a:rPr lang="en-US" sz="1100" b="0" i="0" dirty="0">
+                <a:solidFill>
+                  <a:srgbClr val="F9F5EE"/>
+                </a:solidFill>
+                <a:latin typeface="Instrument Sans"/>
+                <a:cs typeface="Instrument Sans"/>
+              </a:rPr>
+              <a:t>• Resolves host once, blocks loopback/private/link-local/169.254.169.254, and pins IP via hostaddr against DNS rebinding.
+• TLS verify-full default (bundled Supabase CA).
+• default_transaction_read_only=on, BEGIN READ ONLY, 10s connect / 20s statement timeouts.</a:t>
+            </a:r>
+          </a:p>
+        </p:txBody>
+      </p:sp>
+      <p:sp>
+        <p:nvSpPr>
+          <p:cNvPr id="12" name="TextBox 12"/>
+          <p:cNvSpPr txBox="1"/>
+          <p:nvPr/>
+        </p:nvSpPr>
+        <p:spPr>
+          <a:xfrm>
+            <a:off x="8000000" y="2050000"/>
+            <a:ext cx="3500000" cy="2850000"/>
+          </a:xfrm>
+          <a:prstGeom prst="roundRect">
+            <a:avLst>
+              <a:gd name="adj" fmla="val 8000"/>
+            </a:avLst>
+          </a:prstGeom>
+          <a:solidFill>
+            <a:srgbClr val="0A0A0A"/>
+          </a:solidFill>
+          <a:ln w="15875">
+            <a:solidFill>
+              <a:srgbClr val="A5B2FF"/>
+            </a:solidFill>
+          </a:ln>
+        </p:spPr>
+        <p:txBody>
+          <a:bodyPr wrap="square" lIns="140000" tIns="110000" rIns="140000" bIns="110000"/>
+          <a:lstStyle/>
+          <a:p>
+            <a:pPr algn="l">
+              <a:lnSpc>
+                <a:spcPct val="120000"/>
+              </a:lnSpc>
+              <a:spcAft>
+                <a:spcPts val="400"/>
+              </a:spcAft>
+            </a:pPr>
+            <a:r>
+              <a:rPr lang="en-US" sz="1000" b="1" i="0" dirty="0">
+                <a:solidFill>
+                  <a:srgbClr val="FFC7AA"/>
+                </a:solidFill>
+                <a:latin typeface="JetBrains Mono"/>
+                <a:cs typeface="JetBrains Mono"/>
+              </a:rPr>
+              <a:t>CANONICAL EQUIVALENCE &amp; TEST PACK</a:t>
+            </a:r>
+          </a:p>
+          <a:p>
+            <a:pPr algn="l">
+              <a:lnSpc>
+                <a:spcPct val="120000"/>
+              </a:lnSpc>
+              <a:spcAft>
+                <a:spcPts val="400"/>
+              </a:spcAft>
+            </a:pPr>
+            <a:r>
+              <a:rPr lang="en-US" sz="1700" b="1" i="0" dirty="0">
+                <a:solidFill>
+                  <a:srgbClr val="F9F5EE"/>
+                </a:solidFill>
+                <a:latin typeface="Instrument Sans"/>
+                <a:cs typeface="Instrument Sans"/>
+              </a:rPr>
+              <a:t>Immutable Snapshots + 8 Scenarios</a:t>
+            </a:r>
+          </a:p>
+          <a:p>
+            <a:pPr algn="l">
+              <a:lnSpc>
+                <a:spcPct val="120000"/>
+              </a:lnSpc>
+              <a:spcAft>
+                <a:spcPts val="400"/>
+              </a:spcAft>
+            </a:pPr>
+            <a:r>
+              <a:rPr lang="en-US" sz="1100" b="0" i="0" dirty="0">
+                <a:solidFill>
+                  <a:srgbClr val="F9F5EE"/>
+                </a:solidFill>
+                <a:latin typeface="Instrument Sans"/>
+                <a:cs typeface="Instrument Sans"/>
+              </a:rPr>
+              <a:t>• Identifier regex ^[a-z_][a-z0-9_]{0,62}$ + information_schema check + sql.Identifier.
+• Checksum deduplication returns 'unchanged' on identical data or creates a new immutable dataset version.
+• 8-scenario test-data/ pack (CSV + Postgres demo_shop).</a:t>
+            </a:r>
+          </a:p>
+        </p:txBody>
+      </p:sp>
+      <p:sp>
+        <p:nvSpPr>
+          <p:cNvPr id="13" name="TextBox 13"/>
+          <p:cNvSpPr txBox="1"/>
+          <p:nvPr/>
+        </p:nvSpPr>
+        <p:spPr>
+          <a:xfrm>
+            <a:off x="640000" y="5080000"/>
+            <a:ext cx="10880000" cy="1120000"/>
           </a:xfrm>
           <a:prstGeom prst="roundRect">
             <a:avLst>
@@ -3423,140 +4185,49 @@
               </a:spcAft>
             </a:pPr>
             <a:r>
-              <a:rPr lang="en-US" sz="1100" b="1" i="0" dirty="0">
+              <a:rPr lang="en-US" sz="1000" b="1" i="0" dirty="0">
                 <a:solidFill>
                   <a:srgbClr val="FFC7AA"/>
                 </a:solidFill>
                 <a:latin typeface="JetBrains Mono"/>
                 <a:cs typeface="JetBrains Mono"/>
               </a:rPr>
-              <a:t>RECOVERY &amp; GOOGLE SHEETS EXECUTOR</a:t>
-            </a:r>
-          </a:p>
-          <a:p>
-            <a:pPr algn="l">
-              <a:lnSpc>
-                <a:spcPct val="120000"/>
-              </a:lnSpc>
-              <a:spcAft>
-                <a:spcPts val="400"/>
-              </a:spcAft>
-            </a:pPr>
-            <a:r>
-              <a:rPr lang="en-US" sz="1800" b="1" i="0" dirty="0">
+              <a:t>PHASE 12 ENDPOINTS &amp; VERIFIED EQUIVALENCE (app/sources/router.py · 22 Connector Tests + 67 Vitest)</a:t>
+            </a:r>
+          </a:p>
+          <a:p>
+            <a:pPr algn="l">
+              <a:lnSpc>
+                <a:spcPct val="120000"/>
+              </a:lnSpc>
+              <a:spcAft>
+                <a:spcPts val="400"/>
+              </a:spcAft>
+            </a:pPr>
+            <a:r>
+              <a:rPr lang="en-US" sz="1100" b="0" i="0" dirty="0">
                 <a:solidFill>
                   <a:srgbClr val="F9F5EE"/>
                 </a:solidFill>
-                <a:latin typeface="Instrument Sans"/>
-                <a:cs typeface="Instrument Sans"/>
-              </a:rPr>
-              <a:t>Bounded Estimation → Approval → Read-Back</a:t>
-            </a:r>
-          </a:p>
-          <a:p>
-            <a:pPr algn="l">
-              <a:lnSpc>
-                <a:spcPct val="120000"/>
-              </a:lnSpc>
-              <a:spcAft>
-                <a:spcPts val="400"/>
-              </a:spcAft>
-            </a:pPr>
-            <a:r>
-              <a:rPr lang="en-US" sz="1200" b="0" i="0" dirty="0">
-                <a:solidFill>
-                  <a:srgbClr val="F9F5EE"/>
-                </a:solidFill>
-                <a:latin typeface="Instrument Sans"/>
-                <a:cs typeface="Instrument Sans"/>
-              </a:rPr>
-              <a:t>• recovery/estimator.py calculates low/mid/high recovery ranges with explicit assumptions.
-• Decision Panel binds owner approval to (plan_id, version, content_hash).
-• actions/executor.py reconciles existing keys, appends missing rows, and verifies cell-by-cell (pending → succeeded → verified).</a:t>
-            </a:r>
-          </a:p>
-        </p:txBody>
-      </p:sp>
-      <p:sp>
-        <p:nvSpPr>
-          <p:cNvPr id="12" name="TextBox 12"/>
-          <p:cNvSpPr txBox="1"/>
-          <p:nvPr/>
-        </p:nvSpPr>
-        <p:spPr>
-          <a:xfrm>
-            <a:off x="640000" y="5150000"/>
-            <a:ext cx="10880000" cy="1000000"/>
-          </a:xfrm>
-          <a:prstGeom prst="roundRect">
-            <a:avLst>
-              <a:gd name="adj" fmla="val 8000"/>
-            </a:avLst>
-          </a:prstGeom>
-          <a:solidFill>
-            <a:srgbClr val="0A0A0A"/>
-          </a:solidFill>
-          <a:ln w="15875">
-            <a:solidFill>
-              <a:srgbClr val="FFC7AA"/>
-            </a:solidFill>
-          </a:ln>
-        </p:spPr>
-        <p:txBody>
-          <a:bodyPr wrap="square" lIns="140000" tIns="110000" rIns="140000" bIns="110000"/>
-          <a:lstStyle/>
-          <a:p>
-            <a:pPr algn="l">
-              <a:lnSpc>
-                <a:spcPct val="120000"/>
-              </a:lnSpc>
-              <a:spcAft>
-                <a:spcPts val="400"/>
-              </a:spcAft>
-            </a:pPr>
-            <a:r>
-              <a:rPr lang="en-US" sz="1000" b="1" i="0" dirty="0">
-                <a:solidFill>
-                  <a:srgbClr val="FFC7AA"/>
-                </a:solidFill>
-                <a:latin typeface="JetBrains Mono"/>
-                <a:cs typeface="JetBrains Mono"/>
-              </a:rPr>
-              <a:t>LIVE GOOGLE SHEETS BRIDGE VERIFICATION (AMD-19 / AMD-20)</a:t>
-            </a:r>
-          </a:p>
-          <a:p>
-            <a:pPr algn="l">
-              <a:lnSpc>
-                <a:spcPct val="120000"/>
-              </a:lnSpc>
-              <a:spcAft>
-                <a:spcPts val="400"/>
-              </a:spcAft>
-            </a:pPr>
-            <a:r>
-              <a:rPr lang="en-US" sz="1200" b="0" i="0" dirty="0">
-                <a:solidFill>
-                  <a:srgbClr val="F9F5EE"/>
-                </a:solidFill>
-                <a:latin typeface="Instrument Sans"/>
-                <a:cs typeface="Instrument Sans"/>
-              </a:rPr>
-              <a:t>Action 668e72cb-df08-5545-97d6-96e03454f2ed wrote 1 strategy row to ROOT Review Tasks and 3 customer rows to ROOT Service Queue, verified via independent cell-by-cell read-back in 33.46 s.</a:t>
-            </a:r>
-          </a:p>
-        </p:txBody>
-      </p:sp>
-      <p:sp>
-        <p:nvSpPr>
-          <p:cNvPr id="13" name="TextBox 13"/>
+                <a:latin typeface="JetBrains Mono"/>
+                <a:cs typeface="JetBrains Mono"/>
+              </a:rPr>
+              <a:t>POST /sources/test  ·  POST /sources  ·  GET /sources  ·  POST /sources/{id}/sync
+test_sync_matches_csv_upload: syncing seed-7 data (17,377 orders, 1,500 customers, 120 products, 811 returns) from PostgreSQL produces identical weekly metrics to CSV upload.</a:t>
+            </a:r>
+          </a:p>
+        </p:txBody>
+      </p:sp>
+      <p:sp>
+        <p:nvSpPr>
+          <p:cNvPr id="14" name="TextBox 14"/>
           <p:cNvSpPr txBox="1"/>
           <p:nvPr/>
         </p:nvSpPr>
         <p:spPr>
           <a:xfrm>
             <a:off x="640000" y="6380000"/>
-            <a:ext cx="8000000" cy="320000"/>
+            <a:ext cx="8200000" cy="320000"/>
           </a:xfrm>
           <a:prstGeom prst="rect">
             <a:avLst/>
@@ -3586,14 +4257,14 @@
                 <a:latin typeface="JetBrains Mono"/>
                 <a:cs typeface="JetBrains Mono"/>
               </a:rPr>
-              <a:t>Biztective (ROOT 2.0)  ·  Clouds by Alternate Futures  ·  https://root-web-app.alternatefutures.ai</a:t>
-            </a:r>
-          </a:p>
-        </p:txBody>
-      </p:sp>
-      <p:sp>
-        <p:nvSpPr>
-          <p:cNvPr id="14" name="TextBox 14"/>
+              <a:t>Biztective (ROOT 2.0)  ·  Phases 1–12  ·  Clouds by Alternate Futures  ·  https://root-web-app.alternatefutures.ai</a:t>
+            </a:r>
+          </a:p>
+        </p:txBody>
+      </p:sp>
+      <p:sp>
+        <p:nvSpPr>
+          <p:cNvPr id="15" name="TextBox 15"/>
           <p:cNvSpPr txBox="1"/>
           <p:nvPr/>
         </p:nvSpPr>
@@ -3630,7 +4301,7 @@
                 <a:latin typeface="JetBrains Mono"/>
                 <a:cs typeface="JetBrains Mono"/>
               </a:rPr>
-              <a:t>SLIDE 04 / 10</a:t>
+              <a:t>SLIDE 04 / 11</a:t>
             </a:r>
           </a:p>
         </p:txBody>
@@ -3649,7 +4320,7 @@
     <p:bg>
       <p:bgPr>
         <a:solidFill>
-          <a:srgbClr val="F9F5EE"/>
+          <a:srgbClr val="0000AF"/>
         </a:solidFill>
         <a:effectLst/>
       </p:bgPr>
@@ -3676,7 +4347,7 @@
         </p:nvSpPr>
         <p:spPr>
           <a:xfrm>
-            <a:off x="10700000" y="950000"/>
+            <a:off x="10500000" y="1000000"/>
             <a:ext cx="420000" cy="420000"/>
           </a:xfrm>
           <a:prstGeom prst="star4">
@@ -3685,7 +4356,7 @@
             </a:avLst>
           </a:prstGeom>
           <a:solidFill>
-            <a:srgbClr val="000AFF">
+            <a:srgbClr val="F9F5EE">
               <a:alpha val="14000"/>
             </a:srgbClr>
           </a:solidFill>
@@ -3702,7 +4373,7 @@
         </p:nvSpPr>
         <p:spPr>
           <a:xfrm>
-            <a:off x="9700000" y="1800000"/>
+            <a:off x="11100000" y="2400000"/>
             <a:ext cx="220000" cy="220000"/>
           </a:xfrm>
           <a:prstGeom prst="star4">
@@ -3711,7 +4382,33 @@
             </a:avLst>
           </a:prstGeom>
           <a:solidFill>
-            <a:srgbClr val="BE4200">
+            <a:srgbClr val="FFC7AA">
+              <a:alpha val="20000"/>
+            </a:srgbClr>
+          </a:solidFill>
+          <a:ln>
+            <a:noFill/>
+          </a:ln>
+        </p:spPr>
+      </p:sp>
+      <p:sp>
+        <p:nvSpPr>
+          <p:cNvPr id="4" name="AF Star 4"/>
+          <p:cNvSpPr/>
+          <p:nvPr/>
+        </p:nvSpPr>
+        <p:spPr>
+          <a:xfrm>
+            <a:off x="900000" y="5200000"/>
+            <a:ext cx="380000" cy="380000"/>
+          </a:xfrm>
+          <a:prstGeom prst="star4">
+            <a:avLst>
+              <a:gd name="adj" fmla="val 18000"/>
+            </a:avLst>
+          </a:prstGeom>
+          <a:solidFill>
+            <a:srgbClr val="A5B2FF">
               <a:alpha val="14000"/>
             </a:srgbClr>
           </a:solidFill>
@@ -3722,14 +4419,38 @@
       </p:sp>
       <p:sp>
         <p:nvSpPr>
-          <p:cNvPr id="4" name="TextBox 4"/>
+          <p:cNvPr id="5" name="AF Ring 5"/>
+          <p:cNvSpPr/>
+          <p:nvPr/>
+        </p:nvSpPr>
+        <p:spPr>
+          <a:xfrm>
+            <a:off x="-500000" y="4800000"/>
+            <a:ext cx="2000000" cy="2000000"/>
+          </a:xfrm>
+          <a:prstGeom prst="ellipse">
+            <a:avLst/>
+          </a:prstGeom>
+          <a:noFill/>
+          <a:ln w="38100">
+            <a:solidFill>
+              <a:srgbClr val="A5B2FF">
+                <a:alpha val="15000"/>
+              </a:srgbClr>
+            </a:solidFill>
+          </a:ln>
+        </p:spPr>
+      </p:sp>
+      <p:sp>
+        <p:nvSpPr>
+          <p:cNvPr id="6" name="TextBox 6"/>
           <p:cNvSpPr txBox="1"/>
           <p:nvPr/>
         </p:nvSpPr>
         <p:spPr>
           <a:xfrm>
             <a:off x="640000" y="280000"/>
-            <a:ext cx="6800000" cy="420000"/>
+            <a:ext cx="7200000" cy="420000"/>
           </a:xfrm>
           <a:prstGeom prst="rect">
             <a:avLst/>
@@ -3754,19 +4475,19 @@
             <a:r>
               <a:rPr lang="en-US" sz="1100" b="1" i="0" dirty="0">
                 <a:solidFill>
-                  <a:srgbClr val="000AFF"/>
-                </a:solidFill>
-                <a:latin typeface="JetBrains Mono"/>
-                <a:cs typeface="JetBrains Mono"/>
-              </a:rPr>
-              <a:t>ALTERNATE FUTURES  ·  04 · PRODUCTION TOPOLOGY ON CLOUDS BY ALTERNATE FUTURES</a:t>
-            </a:r>
-          </a:p>
-        </p:txBody>
-      </p:sp>
-      <p:sp>
-        <p:nvSpPr>
-          <p:cNvPr id="5" name="TextBox 5"/>
+                  <a:srgbClr val="A5B2FF"/>
+                </a:solidFill>
+                <a:latin typeface="JetBrains Mono"/>
+                <a:cs typeface="JetBrains Mono"/>
+              </a:rPr>
+              <a:t>ALTERNATE FUTURES  ·  04 · STATE MACHINE &amp; HUMAN-IN-THE-LOOP</a:t>
+            </a:r>
+          </a:p>
+        </p:txBody>
+      </p:sp>
+      <p:sp>
+        <p:nvSpPr>
+          <p:cNvPr id="7" name="TextBox 7"/>
           <p:cNvSpPr txBox="1"/>
           <p:nvPr/>
         </p:nvSpPr>
@@ -3781,7 +4502,7 @@
             </a:avLst>
           </a:prstGeom>
           <a:solidFill>
-            <a:srgbClr val="000AFF"/>
+            <a:srgbClr val="FFC7AA"/>
           </a:solidFill>
           <a:ln>
             <a:noFill/>
@@ -3802,19 +4523,19 @@
             <a:r>
               <a:rPr lang="en-US" sz="1000" b="1" i="0" dirty="0">
                 <a:solidFill>
-                  <a:srgbClr val="FFFFFF"/>
-                </a:solidFill>
-                <a:latin typeface="JetBrains Mono"/>
-                <a:cs typeface="JetBrains Mono"/>
-              </a:rPr>
-              <a:t>Project: root-2</a:t>
-            </a:r>
-          </a:p>
-        </p:txBody>
-      </p:sp>
-      <p:sp>
-        <p:nvSpPr>
-          <p:cNvPr id="6" name="Rect 6"/>
+                  <a:srgbClr val="0000AF"/>
+                </a:solidFill>
+                <a:latin typeface="JetBrains Mono"/>
+                <a:cs typeface="JetBrains Mono"/>
+              </a:rPr>
+              <a:t>Durable PostgreSQL Checkpoints</a:t>
+            </a:r>
+          </a:p>
+        </p:txBody>
+      </p:sp>
+      <p:sp>
+        <p:nvSpPr>
+          <p:cNvPr id="8" name="Rect 8"/>
           <p:cNvSpPr/>
           <p:nvPr/>
         </p:nvSpPr>
@@ -3827,7 +4548,7 @@
             <a:avLst/>
           </a:prstGeom>
           <a:solidFill>
-            <a:srgbClr val="000AFF">
+            <a:srgbClr val="F9F5EE">
               <a:alpha val="22000"/>
             </a:srgbClr>
           </a:solidFill>
@@ -3838,14 +4559,14 @@
       </p:sp>
       <p:sp>
         <p:nvSpPr>
-          <p:cNvPr id="7" name="TextBox 7"/>
-          <p:cNvSpPr txBox="1"/>
-          <p:nvPr/>
-        </p:nvSpPr>
-        <p:spPr>
-          <a:xfrm>
-            <a:off x="640000" y="900000"/>
-            <a:ext cx="10900000" cy="1050000"/>
+          <p:cNvPr id="9" name="TextBox 9"/>
+          <p:cNvSpPr txBox="1"/>
+          <p:nvPr/>
+        </p:nvSpPr>
+        <p:spPr>
+          <a:xfrm>
+            <a:off x="640000" y="920000"/>
+            <a:ext cx="10900000" cy="1100000"/>
           </a:xfrm>
           <a:prstGeom prst="rect">
             <a:avLst/>
@@ -3868,48 +4589,140 @@
               </a:spcAft>
             </a:pPr>
             <a:r>
-              <a:rPr lang="en-US" sz="2600" b="1" i="0" dirty="0">
-                <a:solidFill>
-                  <a:srgbClr val="0000AF"/>
+              <a:rPr lang="en-US" sz="2700" b="1" i="0" dirty="0">
+                <a:solidFill>
+                  <a:srgbClr val="F9F5EE"/>
                 </a:solidFill>
                 <a:latin typeface="Instrument Sans"/>
                 <a:cs typeface="Instrument Sans"/>
               </a:rPr>
-              <a:t>Containerized Multi-Service Deployment on Decentralized Compute</a:t>
-            </a:r>
-          </a:p>
-          <a:p>
-            <a:pPr algn="l">
-              <a:lnSpc>
-                <a:spcPct val="120000"/>
-              </a:lnSpc>
-              <a:spcAft>
-                <a:spcPts val="400"/>
-              </a:spcAft>
-            </a:pPr>
-            <a:r>
-              <a:rPr lang="en-US" sz="1300" b="0" i="0" dirty="0">
-                <a:solidFill>
-                  <a:srgbClr val="1A1A1A"/>
+              <a:t>Ten-Stage Verified Pipeline Across Human &amp; Container Restarts</a:t>
+            </a:r>
+          </a:p>
+          <a:p>
+            <a:pPr algn="l">
+              <a:lnSpc>
+                <a:spcPct val="120000"/>
+              </a:lnSpc>
+              <a:spcAft>
+                <a:spcPts val="400"/>
+              </a:spcAft>
+            </a:pPr>
+            <a:r>
+              <a:rPr lang="en-US" sz="1400" b="1" i="0" dirty="0">
+                <a:solidFill>
+                  <a:srgbClr val="FFC7AA"/>
+                </a:solidFill>
+                <a:latin typeface="JetBrains Mono"/>
+                <a:cs typeface="JetBrains Mono"/>
+              </a:rPr>
+              <a:t>Upload/Sync → Analyze → Detect → Investigate → Clarify → Revise → Plan → Approve → Execute → Verify</a:t>
+            </a:r>
+          </a:p>
+        </p:txBody>
+      </p:sp>
+      <p:sp>
+        <p:nvSpPr>
+          <p:cNvPr id="10" name="TextBox 10"/>
+          <p:cNvSpPr txBox="1"/>
+          <p:nvPr/>
+        </p:nvSpPr>
+        <p:spPr>
+          <a:xfrm>
+            <a:off x="640000" y="2150000"/>
+            <a:ext cx="5300000" cy="2800000"/>
+          </a:xfrm>
+          <a:prstGeom prst="roundRect">
+            <a:avLst>
+              <a:gd name="adj" fmla="val 8000"/>
+            </a:avLst>
+          </a:prstGeom>
+          <a:solidFill>
+            <a:srgbClr val="0A0A0A"/>
+          </a:solidFill>
+          <a:ln w="15875">
+            <a:solidFill>
+              <a:srgbClr val="A5B2FF"/>
+            </a:solidFill>
+          </a:ln>
+        </p:spPr>
+        <p:txBody>
+          <a:bodyPr wrap="square" lIns="140000" tIns="110000" rIns="140000" bIns="110000"/>
+          <a:lstStyle/>
+          <a:p>
+            <a:pPr algn="l">
+              <a:lnSpc>
+                <a:spcPct val="120000"/>
+              </a:lnSpc>
+              <a:spcAft>
+                <a:spcPts val="400"/>
+              </a:spcAft>
+            </a:pPr>
+            <a:r>
+              <a:rPr lang="en-US" sz="1100" b="1" i="0" dirty="0">
+                <a:solidFill>
+                  <a:srgbClr val="A5B2FF"/>
+                </a:solidFill>
+                <a:latin typeface="JetBrains Mono"/>
+                <a:cs typeface="JetBrains Mono"/>
+              </a:rPr>
+              <a:t>INVESTIGATION SUBGRAPH (10 NODES)</a:t>
+            </a:r>
+          </a:p>
+          <a:p>
+            <a:pPr algn="l">
+              <a:lnSpc>
+                <a:spcPct val="120000"/>
+              </a:lnSpc>
+              <a:spcAft>
+                <a:spcPts val="400"/>
+              </a:spcAft>
+            </a:pPr>
+            <a:r>
+              <a:rPr lang="en-US" sz="1800" b="1" i="0" dirty="0">
+                <a:solidFill>
+                  <a:srgbClr val="F9F5EE"/>
                 </a:solidFill>
                 <a:latin typeface="Instrument Sans"/>
                 <a:cs typeface="Instrument Sans"/>
               </a:rPr>
-              <a:t>Deployed with @alternatefutures/acc v1.10.0 on Akash providers behind Clouds managed HTTPS ingress, connected to Supabase PostgreSQL over TLS (sslmode=require).</a:t>
-            </a:r>
-          </a:p>
-        </p:txBody>
-      </p:sp>
-      <p:sp>
-        <p:nvSpPr>
-          <p:cNvPr id="8" name="TextBox 8"/>
-          <p:cNvSpPr txBox="1"/>
-          <p:nvPr/>
-        </p:nvSpPr>
-        <p:spPr>
-          <a:xfrm>
-            <a:off x="640000" y="2050000"/>
-            <a:ext cx="3500000" cy="4050000"/>
+              <a:t>Evidence Gathering → Critic → Clarification</a:t>
+            </a:r>
+          </a:p>
+          <a:p>
+            <a:pPr algn="l">
+              <a:lnSpc>
+                <a:spcPct val="120000"/>
+              </a:lnSpc>
+              <a:spcAft>
+                <a:spcPts val="400"/>
+              </a:spcAft>
+            </a:pPr>
+            <a:r>
+              <a:rPr lang="en-US" sz="1200" b="0" i="0" dirty="0">
+                <a:solidFill>
+                  <a:srgbClr val="F9F5EE"/>
+                </a:solidFill>
+                <a:latin typeface="Instrument Sans"/>
+                <a:cs typeface="Instrument Sans"/>
+              </a:rPr>
+              <a:t>• load_context → plan_checks → run_verification executes read-only SQL checks for return spikes and vendor defects.
+• critic → decide_next enforces sample size and time-window rules.
+• ask_human pauses at awaiting_human in langgraph.checkpoints; each owner answer creates an immutable interpretation_versions row (v1 → v2).</a:t>
+            </a:r>
+          </a:p>
+        </p:txBody>
+      </p:sp>
+      <p:sp>
+        <p:nvSpPr>
+          <p:cNvPr id="11" name="TextBox 11"/>
+          <p:cNvSpPr txBox="1"/>
+          <p:nvPr/>
+        </p:nvSpPr>
+        <p:spPr>
+          <a:xfrm>
+            <a:off x="6220000" y="2150000"/>
+            <a:ext cx="5300000" cy="2800000"/>
           </a:xfrm>
           <a:prstGeom prst="roundRect">
             <a:avLst>
@@ -3917,11 +4730,11 @@
             </a:avLst>
           </a:prstGeom>
           <a:solidFill>
-            <a:srgbClr val="FFFFFF"/>
+            <a:srgbClr val="0A0A0A"/>
           </a:solidFill>
           <a:ln w="15875">
             <a:solidFill>
-              <a:srgbClr val="000AFF"/>
+              <a:srgbClr val="FFC7AA"/>
             </a:solidFill>
           </a:ln>
         </p:spPr>
@@ -3938,72 +4751,70 @@
               </a:spcAft>
             </a:pPr>
             <a:r>
-              <a:rPr lang="en-US" sz="1000" b="1" i="0" dirty="0">
-                <a:solidFill>
-                  <a:srgbClr val="000AFF"/>
-                </a:solidFill>
-                <a:latin typeface="JetBrains Mono"/>
-                <a:cs typeface="JetBrains Mono"/>
-              </a:rPr>
-              <a:t>FRONTEND SERVICE · root-web</a:t>
-            </a:r>
-          </a:p>
-          <a:p>
-            <a:pPr algn="l">
-              <a:lnSpc>
-                <a:spcPct val="120000"/>
-              </a:lnSpc>
-              <a:spcAft>
-                <a:spcPts val="400"/>
-              </a:spcAft>
-            </a:pPr>
-            <a:r>
-              <a:rPr lang="en-US" sz="1300" b="1" i="0" dirty="0">
-                <a:solidFill>
-                  <a:srgbClr val="0000AF"/>
-                </a:solidFill>
-                <a:latin typeface="JetBrains Mono"/>
-                <a:cs typeface="JetBrains Mono"/>
-              </a:rPr>
-              <a:t>https://root-web-app.alternatefutures.ai</a:t>
-            </a:r>
-          </a:p>
-          <a:p>
-            <a:pPr algn="l">
-              <a:lnSpc>
-                <a:spcPct val="120000"/>
-              </a:lnSpc>
-              <a:spcAft>
-                <a:spcPts val="400"/>
-              </a:spcAft>
-            </a:pPr>
-            <a:r>
-              <a:rPr lang="en-US" sz="1200" b="0" i="0" dirty="0">
-                <a:solidFill>
-                  <a:srgbClr val="1A1A1A"/>
+              <a:rPr lang="en-US" sz="1100" b="1" i="0" dirty="0">
+                <a:solidFill>
+                  <a:srgbClr val="FFC7AA"/>
+                </a:solidFill>
+                <a:latin typeface="JetBrains Mono"/>
+                <a:cs typeface="JetBrains Mono"/>
+              </a:rPr>
+              <a:t>RECOVERY &amp; GOOGLE SHEETS EXECUTOR</a:t>
+            </a:r>
+          </a:p>
+          <a:p>
+            <a:pPr algn="l">
+              <a:lnSpc>
+                <a:spcPct val="120000"/>
+              </a:lnSpc>
+              <a:spcAft>
+                <a:spcPts val="400"/>
+              </a:spcAft>
+            </a:pPr>
+            <a:r>
+              <a:rPr lang="en-US" sz="1800" b="1" i="0" dirty="0">
+                <a:solidFill>
+                  <a:srgbClr val="F9F5EE"/>
                 </a:solidFill>
                 <a:latin typeface="Instrument Sans"/>
                 <a:cs typeface="Instrument Sans"/>
               </a:rPr>
-              <a:t>• Service ID: cmvbx1b1016uebs1u7l6ge6p7
-• Akash Lease DSEQ: 29100447
-• Base: node:24.14.1-alpine3.21 (Standalone Next.js 16.4.2)
-• Image: ttl.sh/root2-mahateer-web-1.0.2:24h
-• Non-root UID 10001 · Port 3000 · 1 vCPU / 2 GiB RAM</a:t>
-            </a:r>
-          </a:p>
-        </p:txBody>
-      </p:sp>
-      <p:sp>
-        <p:nvSpPr>
-          <p:cNvPr id="9" name="TextBox 9"/>
-          <p:cNvSpPr txBox="1"/>
-          <p:nvPr/>
-        </p:nvSpPr>
-        <p:spPr>
-          <a:xfrm>
-            <a:off x="4320000" y="2050000"/>
-            <a:ext cx="3500000" cy="4050000"/>
+              <a:t>Bounded Estimation → Approval → Read-Back</a:t>
+            </a:r>
+          </a:p>
+          <a:p>
+            <a:pPr algn="l">
+              <a:lnSpc>
+                <a:spcPct val="120000"/>
+              </a:lnSpc>
+              <a:spcAft>
+                <a:spcPts val="400"/>
+              </a:spcAft>
+            </a:pPr>
+            <a:r>
+              <a:rPr lang="en-US" sz="1200" b="0" i="0" dirty="0">
+                <a:solidFill>
+                  <a:srgbClr val="F9F5EE"/>
+                </a:solidFill>
+                <a:latin typeface="Instrument Sans"/>
+                <a:cs typeface="Instrument Sans"/>
+              </a:rPr>
+              <a:t>• recovery/estimator.py calculates low/mid/high recovery ranges with explicit assumptions.
+• Decision Panel binds owner approval to (plan_id, version, content_hash).
+• actions/executor.py reconciles existing keys, appends missing rows, and verifies cell-by-cell (pending → succeeded → verified).</a:t>
+            </a:r>
+          </a:p>
+        </p:txBody>
+      </p:sp>
+      <p:sp>
+        <p:nvSpPr>
+          <p:cNvPr id="12" name="TextBox 12"/>
+          <p:cNvSpPr txBox="1"/>
+          <p:nvPr/>
+        </p:nvSpPr>
+        <p:spPr>
+          <a:xfrm>
+            <a:off x="640000" y="5150000"/>
+            <a:ext cx="10880000" cy="1000000"/>
           </a:xfrm>
           <a:prstGeom prst="roundRect">
             <a:avLst>
@@ -4011,11 +4822,11 @@
             </a:avLst>
           </a:prstGeom>
           <a:solidFill>
-            <a:srgbClr val="FFFFFF"/>
+            <a:srgbClr val="0A0A0A"/>
           </a:solidFill>
           <a:ln w="15875">
             <a:solidFill>
-              <a:srgbClr val="000AFF"/>
+              <a:srgbClr val="FFC7AA"/>
             </a:solidFill>
           </a:ln>
         </p:spPr>
@@ -4034,32 +4845,12 @@
             <a:r>
               <a:rPr lang="en-US" sz="1000" b="1" i="0" dirty="0">
                 <a:solidFill>
-                  <a:srgbClr val="000AFF"/>
-                </a:solidFill>
-                <a:latin typeface="JetBrains Mono"/>
-                <a:cs typeface="JetBrains Mono"/>
-              </a:rPr>
-              <a:t>BACKEND SERVICE · root-api</a:t>
-            </a:r>
-          </a:p>
-          <a:p>
-            <a:pPr algn="l">
-              <a:lnSpc>
-                <a:spcPct val="120000"/>
-              </a:lnSpc>
-              <a:spcAft>
-                <a:spcPts val="400"/>
-              </a:spcAft>
-            </a:pPr>
-            <a:r>
-              <a:rPr lang="en-US" sz="1300" b="1" i="0" dirty="0">
-                <a:solidFill>
-                  <a:srgbClr val="0000AF"/>
-                </a:solidFill>
-                <a:latin typeface="JetBrains Mono"/>
-                <a:cs typeface="JetBrains Mono"/>
-              </a:rPr>
-              <a:t>https://root-api-app.alternatefutures.ai</a:t>
+                  <a:srgbClr val="FFC7AA"/>
+                </a:solidFill>
+                <a:latin typeface="JetBrains Mono"/>
+                <a:cs typeface="JetBrains Mono"/>
+              </a:rPr>
+              <a:t>LIVE GOOGLE SHEETS BRIDGE VERIFICATION (AMD-19 / AMD-20)</a:t>
             </a:r>
           </a:p>
           <a:p>
@@ -4074,123 +4865,26 @@
             <a:r>
               <a:rPr lang="en-US" sz="1200" b="0" i="0" dirty="0">
                 <a:solidFill>
-                  <a:srgbClr val="1A1A1A"/>
+                  <a:srgbClr val="F9F5EE"/>
                 </a:solidFill>
                 <a:latin typeface="Instrument Sans"/>
                 <a:cs typeface="Instrument Sans"/>
               </a:rPr>
-              <a:t>• Service ID: cmvbwfap014pibs1u7pxz2e5k
-• Akash Lease DSEQ: 29100292
-• Base: python:3.13-slim-bookworm (uv.lock frozen)
-• Image: ttl.sh/root2-mahateer-api-1.0.2:24h
-• Non-root UID 10001 · Port 8000 · --workers 1 · /api/v1/readyz</a:t>
-            </a:r>
-          </a:p>
-        </p:txBody>
-      </p:sp>
-      <p:sp>
-        <p:nvSpPr>
-          <p:cNvPr id="10" name="TextBox 10"/>
-          <p:cNvSpPr txBox="1"/>
-          <p:nvPr/>
-        </p:nvSpPr>
-        <p:spPr>
-          <a:xfrm>
-            <a:off x="8000000" y="2050000"/>
-            <a:ext cx="3500000" cy="4050000"/>
-          </a:xfrm>
-          <a:prstGeom prst="roundRect">
-            <a:avLst>
-              <a:gd name="adj" fmla="val 8000"/>
-            </a:avLst>
-          </a:prstGeom>
-          <a:solidFill>
-            <a:srgbClr val="FFFFFF"/>
-          </a:solidFill>
-          <a:ln w="15875">
-            <a:solidFill>
-              <a:srgbClr val="000AFF"/>
-            </a:solidFill>
-          </a:ln>
-        </p:spPr>
-        <p:txBody>
-          <a:bodyPr wrap="square" lIns="140000" tIns="110000" rIns="140000" bIns="110000"/>
-          <a:lstStyle/>
-          <a:p>
-            <a:pPr algn="l">
-              <a:lnSpc>
-                <a:spcPct val="120000"/>
-              </a:lnSpc>
-              <a:spcAft>
-                <a:spcPts val="400"/>
-              </a:spcAft>
-            </a:pPr>
-            <a:r>
-              <a:rPr lang="en-US" sz="1000" b="1" i="0" dirty="0">
-                <a:solidFill>
-                  <a:srgbClr val="000AFF"/>
-                </a:solidFill>
-                <a:latin typeface="JetBrains Mono"/>
-                <a:cs typeface="JetBrains Mono"/>
-              </a:rPr>
-              <a:t>MANAGED POSTGRESQL · SUPABASE</a:t>
-            </a:r>
-          </a:p>
-          <a:p>
-            <a:pPr algn="l">
-              <a:lnSpc>
-                <a:spcPct val="120000"/>
-              </a:lnSpc>
-              <a:spcAft>
-                <a:spcPts val="400"/>
-              </a:spcAft>
-            </a:pPr>
-            <a:r>
-              <a:rPr lang="en-US" sz="1300" b="1" i="0" dirty="0">
-                <a:solidFill>
-                  <a:srgbClr val="0000AF"/>
-                </a:solidFill>
-                <a:latin typeface="JetBrains Mono"/>
-                <a:cs typeface="JetBrains Mono"/>
-              </a:rPr>
-              <a:t>TLS sslmode=require · Alembic 0007</a:t>
-            </a:r>
-          </a:p>
-          <a:p>
-            <a:pPr algn="l">
-              <a:lnSpc>
-                <a:spcPct val="120000"/>
-              </a:lnSpc>
-              <a:spcAft>
-                <a:spcPts val="400"/>
-              </a:spcAft>
-            </a:pPr>
-            <a:r>
-              <a:rPr lang="en-US" sz="1200" b="0" i="0" dirty="0">
-                <a:solidFill>
-                  <a:srgbClr val="1A1A1A"/>
-                </a:solidFill>
-                <a:latin typeface="Instrument Sans"/>
-                <a:cs typeface="Instrument Sans"/>
-              </a:rPr>
-              <a:t>• Runtime Role: root_app (NOSUPERUSER, NOBYPASSRLS)
-• Migration Role: postgres (DATABASE_URL_MIGRATIONS)
-• 22 Tenant Tables with ENABLE ROW LEVEL SECURITY
-• Durable LangGraph tables in langgraph.* schema</a:t>
-            </a:r>
-          </a:p>
-        </p:txBody>
-      </p:sp>
-      <p:sp>
-        <p:nvSpPr>
-          <p:cNvPr id="11" name="TextBox 11"/>
+              <a:t>Action 668e72cb-df08-5545-97d6-96e03454f2ed wrote 1 strategy row to ROOT Review Tasks and 3 customer rows to ROOT Service Queue, verified via independent cell-by-cell read-back in 33.46 s.</a:t>
+            </a:r>
+          </a:p>
+        </p:txBody>
+      </p:sp>
+      <p:sp>
+        <p:nvSpPr>
+          <p:cNvPr id="13" name="TextBox 13"/>
           <p:cNvSpPr txBox="1"/>
           <p:nvPr/>
         </p:nvSpPr>
         <p:spPr>
           <a:xfrm>
             <a:off x="640000" y="6380000"/>
-            <a:ext cx="8000000" cy="320000"/>
+            <a:ext cx="8200000" cy="320000"/>
           </a:xfrm>
           <a:prstGeom prst="rect">
             <a:avLst/>
@@ -4215,19 +4909,19 @@
             <a:r>
               <a:rPr lang="en-US" sz="900" b="0" i="0" dirty="0">
                 <a:solidFill>
-                  <a:srgbClr val="0000AF"/>
-                </a:solidFill>
-                <a:latin typeface="JetBrains Mono"/>
-                <a:cs typeface="JetBrains Mono"/>
-              </a:rPr>
-              <a:t>Biztective (ROOT 2.0)  ·  Clouds by Alternate Futures  ·  https://root-web-app.alternatefutures.ai</a:t>
-            </a:r>
-          </a:p>
-        </p:txBody>
-      </p:sp>
-      <p:sp>
-        <p:nvSpPr>
-          <p:cNvPr id="12" name="TextBox 12"/>
+                  <a:srgbClr val="A5B2FF"/>
+                </a:solidFill>
+                <a:latin typeface="JetBrains Mono"/>
+                <a:cs typeface="JetBrains Mono"/>
+              </a:rPr>
+              <a:t>Biztective (ROOT 2.0)  ·  Phases 1–12  ·  Clouds by Alternate Futures  ·  https://root-web-app.alternatefutures.ai</a:t>
+            </a:r>
+          </a:p>
+        </p:txBody>
+      </p:sp>
+      <p:sp>
+        <p:nvSpPr>
+          <p:cNvPr id="14" name="TextBox 14"/>
           <p:cNvSpPr txBox="1"/>
           <p:nvPr/>
         </p:nvSpPr>
@@ -4259,12 +4953,12 @@
             <a:r>
               <a:rPr lang="en-US" sz="900" b="1" i="0" dirty="0">
                 <a:solidFill>
-                  <a:srgbClr val="0000AF"/>
-                </a:solidFill>
-                <a:latin typeface="JetBrains Mono"/>
-                <a:cs typeface="JetBrains Mono"/>
-              </a:rPr>
-              <a:t>SLIDE 05 / 10</a:t>
+                  <a:srgbClr val="A5B2FF"/>
+                </a:solidFill>
+                <a:latin typeface="JetBrains Mono"/>
+                <a:cs typeface="JetBrains Mono"/>
+              </a:rPr>
+              <a:t>SLIDE 05 / 11</a:t>
             </a:r>
           </a:p>
         </p:txBody>
@@ -4310,8 +5004,8 @@
         </p:nvSpPr>
         <p:spPr>
           <a:xfrm>
-            <a:off x="10600000" y="1050000"/>
-            <a:ext cx="400000" cy="400000"/>
+            <a:off x="10700000" y="950000"/>
+            <a:ext cx="420000" cy="420000"/>
           </a:xfrm>
           <a:prstGeom prst="star4">
             <a:avLst>
@@ -4320,7 +5014,7 @@
           </a:prstGeom>
           <a:solidFill>
             <a:srgbClr val="000AFF">
-              <a:alpha val="13000"/>
+              <a:alpha val="14000"/>
             </a:srgbClr>
           </a:solidFill>
           <a:ln>
@@ -4336,8 +5030,8 @@
         </p:nvSpPr>
         <p:spPr>
           <a:xfrm>
-            <a:off x="9500000" y="4700000"/>
-            <a:ext cx="240000" cy="240000"/>
+            <a:off x="9700000" y="1800000"/>
+            <a:ext cx="220000" cy="220000"/>
           </a:xfrm>
           <a:prstGeom prst="star4">
             <a:avLst>
@@ -4345,8 +5039,8 @@
             </a:avLst>
           </a:prstGeom>
           <a:solidFill>
-            <a:srgbClr val="FFC7AA">
-              <a:alpha val="26000"/>
+            <a:srgbClr val="BE4200">
+              <a:alpha val="14000"/>
             </a:srgbClr>
           </a:solidFill>
           <a:ln>
@@ -4356,38 +5050,14 @@
       </p:sp>
       <p:sp>
         <p:nvSpPr>
-          <p:cNvPr id="4" name="AF Ring 4"/>
-          <p:cNvSpPr/>
-          <p:nvPr/>
-        </p:nvSpPr>
-        <p:spPr>
-          <a:xfrm>
-            <a:off x="10500000" y="4900000"/>
-            <a:ext cx="2000000" cy="2000000"/>
-          </a:xfrm>
-          <a:prstGeom prst="ellipse">
-            <a:avLst/>
-          </a:prstGeom>
-          <a:noFill/>
-          <a:ln w="38100">
-            <a:solidFill>
-              <a:srgbClr val="000AFF">
-                <a:alpha val="12000"/>
-              </a:srgbClr>
-            </a:solidFill>
-          </a:ln>
-        </p:spPr>
-      </p:sp>
-      <p:sp>
-        <p:nvSpPr>
-          <p:cNvPr id="5" name="TextBox 5"/>
+          <p:cNvPr id="4" name="TextBox 4"/>
           <p:cNvSpPr txBox="1"/>
           <p:nvPr/>
         </p:nvSpPr>
         <p:spPr>
           <a:xfrm>
             <a:off x="640000" y="280000"/>
-            <a:ext cx="6800000" cy="420000"/>
+            <a:ext cx="7200000" cy="420000"/>
           </a:xfrm>
           <a:prstGeom prst="rect">
             <a:avLst/>
@@ -4417,14 +5087,14 @@
                 <a:latin typeface="JetBrains Mono"/>
                 <a:cs typeface="JetBrains Mono"/>
               </a:rPr>
-              <a:t>ALTERNATE FUTURES  ·  05 · CONTAINER PORTABILITY &amp; FIRST-PARTY SECURITY</a:t>
-            </a:r>
-          </a:p>
-        </p:txBody>
-      </p:sp>
-      <p:sp>
-        <p:nvSpPr>
-          <p:cNvPr id="6" name="TextBox 6"/>
+              <a:t>ALTERNATE FUTURES  ·  05 · PRODUCTION TOPOLOGY ON CLOUDS BY ALTERNATE FUTURES</a:t>
+            </a:r>
+          </a:p>
+        </p:txBody>
+      </p:sp>
+      <p:sp>
+        <p:nvSpPr>
+          <p:cNvPr id="5" name="TextBox 5"/>
           <p:cNvSpPr txBox="1"/>
           <p:nvPr/>
         </p:nvSpPr>
@@ -4465,14 +5135,14 @@
                 <a:latin typeface="JetBrains Mono"/>
                 <a:cs typeface="JetBrains Mono"/>
               </a:rPr>
-              <a:t>AMD-22 · ADR-010</a:t>
-            </a:r>
-          </a:p>
-        </p:txBody>
-      </p:sp>
-      <p:sp>
-        <p:nvSpPr>
-          <p:cNvPr id="7" name="Rect 7"/>
+              <a:t>Project: root-2</a:t>
+            </a:r>
+          </a:p>
+        </p:txBody>
+      </p:sp>
+      <p:sp>
+        <p:nvSpPr>
+          <p:cNvPr id="6" name="Rect 6"/>
           <p:cNvSpPr/>
           <p:nvPr/>
         </p:nvSpPr>
@@ -4496,7 +5166,7 @@
       </p:sp>
       <p:sp>
         <p:nvSpPr>
-          <p:cNvPr id="8" name="TextBox 8"/>
+          <p:cNvPr id="7" name="TextBox 7"/>
           <p:cNvSpPr txBox="1"/>
           <p:nvPr/>
         </p:nvSpPr>
@@ -4533,7 +5203,7 @@
                 <a:latin typeface="Instrument Sans"/>
                 <a:cs typeface="Instrument Sans"/>
               </a:rPr>
-              <a:t>Solving Build-Time Next.js Rewrites for Portable Cloud Containers</a:t>
+              <a:t>Containerized Multi-Service Deployment on Decentralized Compute</a:t>
             </a:r>
           </a:p>
           <a:p>
@@ -4553,21 +5223,21 @@
                 <a:latin typeface="Instrument Sans"/>
                 <a:cs typeface="Instrument Sans"/>
               </a:rPr>
-              <a:t>Next.js evaluates next.config.ts rewrites() at build time. Because Clouds assigns service URLs at deploy time, apps/web/src/proxy.ts rewrites /api/v1/* dynamically at request time.</a:t>
-            </a:r>
-          </a:p>
-        </p:txBody>
-      </p:sp>
-      <p:sp>
-        <p:nvSpPr>
-          <p:cNvPr id="9" name="TextBox 9"/>
+              <a:t>Deployed with @alternatefutures/acc v1.10.0 on Akash providers behind Clouds managed HTTPS ingress, connected to Supabase PostgreSQL over TLS.</a:t>
+            </a:r>
+          </a:p>
+        </p:txBody>
+      </p:sp>
+      <p:sp>
+        <p:nvSpPr>
+          <p:cNvPr id="8" name="TextBox 8"/>
           <p:cNvSpPr txBox="1"/>
           <p:nvPr/>
         </p:nvSpPr>
         <p:spPr>
           <a:xfrm>
             <a:off x="640000" y="2050000"/>
-            <a:ext cx="5300000" cy="2550000"/>
+            <a:ext cx="3500000" cy="4050000"/>
           </a:xfrm>
           <a:prstGeom prst="roundRect">
             <a:avLst>
@@ -4603,63 +5273,65 @@
                 <a:latin typeface="JetBrains Mono"/>
                 <a:cs typeface="JetBrains Mono"/>
               </a:rPr>
-              <a:t>REQUEST-TIME PROXY (apps/web/src/proxy.ts)</a:t>
-            </a:r>
-          </a:p>
-          <a:p>
-            <a:pPr algn="l">
-              <a:lnSpc>
-                <a:spcPct val="120000"/>
-              </a:lnSpc>
-              <a:spcAft>
-                <a:spcPts val="400"/>
-              </a:spcAft>
-            </a:pPr>
-            <a:r>
-              <a:rPr lang="en-US" sz="1800" b="1" i="0" dirty="0">
+              <a:t>FRONTEND SERVICE · root-web</a:t>
+            </a:r>
+          </a:p>
+          <a:p>
+            <a:pPr algn="l">
+              <a:lnSpc>
+                <a:spcPct val="120000"/>
+              </a:lnSpc>
+              <a:spcAft>
+                <a:spcPts val="400"/>
+              </a:spcAft>
+            </a:pPr>
+            <a:r>
+              <a:rPr lang="en-US" sz="1300" b="1" i="0" dirty="0">
                 <a:solidFill>
                   <a:srgbClr val="0000AF"/>
+                </a:solidFill>
+                <a:latin typeface="JetBrains Mono"/>
+                <a:cs typeface="JetBrains Mono"/>
+              </a:rPr>
+              <a:t>https://root-web-app.alternatefutures.ai</a:t>
+            </a:r>
+          </a:p>
+          <a:p>
+            <a:pPr algn="l">
+              <a:lnSpc>
+                <a:spcPct val="120000"/>
+              </a:lnSpc>
+              <a:spcAft>
+                <a:spcPts val="400"/>
+              </a:spcAft>
+            </a:pPr>
+            <a:r>
+              <a:rPr lang="en-US" sz="1200" b="0" i="0" dirty="0">
+                <a:solidFill>
+                  <a:srgbClr val="1A1A1A"/>
                 </a:solidFill>
                 <a:latin typeface="Instrument Sans"/>
                 <a:cs typeface="Instrument Sans"/>
               </a:rPr>
-              <a:t>Dynamic BACKEND_URL Resolution</a:t>
-            </a:r>
-          </a:p>
-          <a:p>
-            <a:pPr algn="l">
-              <a:lnSpc>
-                <a:spcPct val="120000"/>
-              </a:lnSpc>
-              <a:spcAft>
-                <a:spcPts val="400"/>
-              </a:spcAft>
-            </a:pPr>
-            <a:r>
-              <a:rPr lang="en-US" sz="1200" b="0" i="0" dirty="0">
-                <a:solidFill>
-                  <a:srgbClr val="1A1A1A"/>
-                </a:solidFill>
-                <a:latin typeface="Instrument Sans"/>
-                <a:cs typeface="Instrument Sans"/>
-              </a:rPr>
-              <a:t>• Intercepts /api/v1/:path* inside the Next.js server runtime.
-• Reads process.env.BACKEND_URL injected via acc services env set without rebuilding the container.
-• Generates per-request cryptographic CSP nonces on page routes.</a:t>
-            </a:r>
-          </a:p>
-        </p:txBody>
-      </p:sp>
-      <p:sp>
-        <p:nvSpPr>
-          <p:cNvPr id="10" name="TextBox 10"/>
-          <p:cNvSpPr txBox="1"/>
-          <p:nvPr/>
-        </p:nvSpPr>
-        <p:spPr>
-          <a:xfrm>
-            <a:off x="6220000" y="2050000"/>
-            <a:ext cx="5300000" cy="2550000"/>
+              <a:t>• Service ID: cmvbx1b1016uebs1u7l6ge6p7
+• Akash Lease DSEQ: 29100447
+• Base: node:24.14.1-alpine3.21 (Standalone Next.js 16.4.2)
+• Image: ttl.sh/root2-mahateer-web-1.0.3:24h
+• Non-root UID 10001 · Port 3000 · Dual-Source Connect UI</a:t>
+            </a:r>
+          </a:p>
+        </p:txBody>
+      </p:sp>
+      <p:sp>
+        <p:nvSpPr>
+          <p:cNvPr id="9" name="TextBox 9"/>
+          <p:cNvSpPr txBox="1"/>
+          <p:nvPr/>
+        </p:nvSpPr>
+        <p:spPr>
+          <a:xfrm>
+            <a:off x="4320000" y="2050000"/>
+            <a:ext cx="3500000" cy="4050000"/>
           </a:xfrm>
           <a:prstGeom prst="roundRect">
             <a:avLst>
@@ -4695,27 +5367,121 @@
                 <a:latin typeface="JetBrains Mono"/>
                 <a:cs typeface="JetBrains Mono"/>
               </a:rPr>
-              <a:t>FIRST-PARTY HTTPS COOKIE CONTRACT</a:t>
-            </a:r>
-          </a:p>
-          <a:p>
-            <a:pPr algn="l">
-              <a:lnSpc>
-                <a:spcPct val="120000"/>
-              </a:lnSpc>
-              <a:spcAft>
-                <a:spcPts val="400"/>
-              </a:spcAft>
-            </a:pPr>
-            <a:r>
-              <a:rPr lang="en-US" sz="1800" b="1" i="0" dirty="0">
+              <a:t>BACKEND SERVICE · root-api</a:t>
+            </a:r>
+          </a:p>
+          <a:p>
+            <a:pPr algn="l">
+              <a:lnSpc>
+                <a:spcPct val="120000"/>
+              </a:lnSpc>
+              <a:spcAft>
+                <a:spcPts val="400"/>
+              </a:spcAft>
+            </a:pPr>
+            <a:r>
+              <a:rPr lang="en-US" sz="1300" b="1" i="0" dirty="0">
                 <a:solidFill>
                   <a:srgbClr val="0000AF"/>
+                </a:solidFill>
+                <a:latin typeface="JetBrains Mono"/>
+                <a:cs typeface="JetBrains Mono"/>
+              </a:rPr>
+              <a:t>https://root-api-app.alternatefutures.ai</a:t>
+            </a:r>
+          </a:p>
+          <a:p>
+            <a:pPr algn="l">
+              <a:lnSpc>
+                <a:spcPct val="120000"/>
+              </a:lnSpc>
+              <a:spcAft>
+                <a:spcPts val="400"/>
+              </a:spcAft>
+            </a:pPr>
+            <a:r>
+              <a:rPr lang="en-US" sz="1200" b="0" i="0" dirty="0">
+                <a:solidFill>
+                  <a:srgbClr val="1A1A1A"/>
                 </a:solidFill>
                 <a:latin typeface="Instrument Sans"/>
                 <a:cs typeface="Instrument Sans"/>
               </a:rPr>
-              <a:t>__Host- Cookies &amp; Signed Double-Submit CSRF</a:t>
+              <a:t>• Service ID: cmvbwfap014pibs1u7pxz2e5k
+• Akash Lease DSEQ: 29100292
+• Base: python:3.13-slim-bookworm (uv.lock frozen)
+• Image: ttl.sh/root2-mahateer-api-1.0.3:24h
+• Non-root UID 10001 · Port 8000 · --workers 1 · /api/v1/readyz</a:t>
+            </a:r>
+          </a:p>
+        </p:txBody>
+      </p:sp>
+      <p:sp>
+        <p:nvSpPr>
+          <p:cNvPr id="10" name="TextBox 10"/>
+          <p:cNvSpPr txBox="1"/>
+          <p:nvPr/>
+        </p:nvSpPr>
+        <p:spPr>
+          <a:xfrm>
+            <a:off x="8000000" y="2050000"/>
+            <a:ext cx="3500000" cy="4050000"/>
+          </a:xfrm>
+          <a:prstGeom prst="roundRect">
+            <a:avLst>
+              <a:gd name="adj" fmla="val 8000"/>
+            </a:avLst>
+          </a:prstGeom>
+          <a:solidFill>
+            <a:srgbClr val="FFFFFF"/>
+          </a:solidFill>
+          <a:ln w="15875">
+            <a:solidFill>
+              <a:srgbClr val="000AFF"/>
+            </a:solidFill>
+          </a:ln>
+        </p:spPr>
+        <p:txBody>
+          <a:bodyPr wrap="square" lIns="140000" tIns="110000" rIns="140000" bIns="110000"/>
+          <a:lstStyle/>
+          <a:p>
+            <a:pPr algn="l">
+              <a:lnSpc>
+                <a:spcPct val="120000"/>
+              </a:lnSpc>
+              <a:spcAft>
+                <a:spcPts val="400"/>
+              </a:spcAft>
+            </a:pPr>
+            <a:r>
+              <a:rPr lang="en-US" sz="1000" b="1" i="0" dirty="0">
+                <a:solidFill>
+                  <a:srgbClr val="000AFF"/>
+                </a:solidFill>
+                <a:latin typeface="JetBrains Mono"/>
+                <a:cs typeface="JetBrains Mono"/>
+              </a:rPr>
+              <a:t>MANAGED POSTGRESQL · SUPABASE</a:t>
+            </a:r>
+          </a:p>
+          <a:p>
+            <a:pPr algn="l">
+              <a:lnSpc>
+                <a:spcPct val="120000"/>
+              </a:lnSpc>
+              <a:spcAft>
+                <a:spcPts val="400"/>
+              </a:spcAft>
+            </a:pPr>
+            <a:r>
+              <a:rPr lang="en-US" sz="1300" b="1" i="0" dirty="0">
+                <a:solidFill>
+                  <a:srgbClr val="0000AF"/>
+                </a:solidFill>
+                <a:latin typeface="JetBrains Mono"/>
+                <a:cs typeface="JetBrains Mono"/>
+              </a:rPr>
+              <a:t>TLS sslmode=require · Alembic 0008</a:t>
             </a:r>
           </a:p>
           <a:p>
@@ -4735,9 +5501,10 @@
                 <a:latin typeface="Instrument Sans"/>
                 <a:cs typeface="Instrument Sans"/>
               </a:rPr>
-              <a:t>• Browser traffic stays 100% same-origin on https://root-web-app.alternatefutures.ai.
-• __Host-root_session (Secure; HttpOnly; SameSite=Lax; Path=/) &amp; __Host-root_csrf (SameSite=Strict).
-• Backend verifies Origin == FRONTEND_ORIGIN + HMAC-SHA256 CSRF token.</a:t>
+              <a:t>• Runtime Role: root_app (NOSUPERUSER, NOBYPASSRLS)
+• Migration Role: postgres (DATABASE_URL_MIGRATIONS)
+• 23 Tenant Tables with FORCE/ENABLE ROW LEVEL SECURITY
+• Demo Business Source: demo_shop via shop_reader role</a:t>
             </a:r>
           </a:p>
         </p:txBody>
@@ -4750,81 +5517,8 @@
         </p:nvSpPr>
         <p:spPr>
           <a:xfrm>
-            <a:off x="640000" y="4800000"/>
-            <a:ext cx="10880000" cy="1350000"/>
-          </a:xfrm>
-          <a:prstGeom prst="roundRect">
-            <a:avLst>
-              <a:gd name="adj" fmla="val 8000"/>
-            </a:avLst>
-          </a:prstGeom>
-          <a:solidFill>
-            <a:srgbClr val="0A0A0A"/>
-          </a:solidFill>
-          <a:ln w="15875">
-            <a:solidFill>
-              <a:srgbClr val="A5B2FF"/>
-            </a:solidFill>
-          </a:ln>
-        </p:spPr>
-        <p:txBody>
-          <a:bodyPr wrap="square" lIns="140000" tIns="110000" rIns="140000" bIns="110000"/>
-          <a:lstStyle/>
-          <a:p>
-            <a:pPr algn="l">
-              <a:lnSpc>
-                <a:spcPct val="120000"/>
-              </a:lnSpc>
-              <a:spcAft>
-                <a:spcPts val="400"/>
-              </a:spcAft>
-            </a:pPr>
-            <a:r>
-              <a:rPr lang="en-US" sz="1000" b="1" i="0" dirty="0">
-                <a:solidFill>
-                  <a:srgbClr val="FFC7AA"/>
-                </a:solidFill>
-                <a:latin typeface="JetBrains Mono"/>
-                <a:cs typeface="JetBrains Mono"/>
-              </a:rPr>
-              <a:t>// apps/web/src/proxy.ts — Request-time /api/v1/* rewrite (AMD-22)</a:t>
-            </a:r>
-          </a:p>
-          <a:p>
-            <a:pPr algn="l">
-              <a:lnSpc>
-                <a:spcPct val="120000"/>
-              </a:lnSpc>
-              <a:spcAft>
-                <a:spcPts val="400"/>
-              </a:spcAft>
-            </a:pPr>
-            <a:r>
-              <a:rPr lang="en-US" sz="1100" b="0" i="0" dirty="0">
-                <a:solidFill>
-                  <a:srgbClr val="F9F5EE"/>
-                </a:solidFill>
-                <a:latin typeface="JetBrains Mono"/>
-                <a:cs typeface="JetBrains Mono"/>
-              </a:rPr>
-              <a:t>if (pathname.startsWith("/api/v1/")) {
-  const target = new URL(`${pathname}${request.nextUrl.search}`, backendOrigin());
-  return NextResponse.rewrite(target); // -&gt; https://root-api-app.alternatefutures.ai/api/v1/*
-}</a:t>
-            </a:r>
-          </a:p>
-        </p:txBody>
-      </p:sp>
-      <p:sp>
-        <p:nvSpPr>
-          <p:cNvPr id="12" name="TextBox 12"/>
-          <p:cNvSpPr txBox="1"/>
-          <p:nvPr/>
-        </p:nvSpPr>
-        <p:spPr>
-          <a:xfrm>
             <a:off x="640000" y="6380000"/>
-            <a:ext cx="8000000" cy="320000"/>
+            <a:ext cx="8200000" cy="320000"/>
           </a:xfrm>
           <a:prstGeom prst="rect">
             <a:avLst/>
@@ -4854,14 +5548,14 @@
                 <a:latin typeface="JetBrains Mono"/>
                 <a:cs typeface="JetBrains Mono"/>
               </a:rPr>
-              <a:t>Biztective (ROOT 2.0)  ·  Clouds by Alternate Futures  ·  https://root-web-app.alternatefutures.ai</a:t>
-            </a:r>
-          </a:p>
-        </p:txBody>
-      </p:sp>
-      <p:sp>
-        <p:nvSpPr>
-          <p:cNvPr id="13" name="TextBox 13"/>
+              <a:t>Biztective (ROOT 2.0)  ·  Phases 1–12  ·  Clouds by Alternate Futures  ·  https://root-web-app.alternatefutures.ai</a:t>
+            </a:r>
+          </a:p>
+        </p:txBody>
+      </p:sp>
+      <p:sp>
+        <p:nvSpPr>
+          <p:cNvPr id="12" name="TextBox 12"/>
           <p:cNvSpPr txBox="1"/>
           <p:nvPr/>
         </p:nvSpPr>
@@ -4898,7 +5592,7 @@
                 <a:latin typeface="JetBrains Mono"/>
                 <a:cs typeface="JetBrains Mono"/>
               </a:rPr>
-              <a:t>SLIDE 06 / 10</a:t>
+              <a:t>SLIDE 06 / 11</a:t>
             </a:r>
           </a:p>
         </p:txBody>
@@ -4912,6 +5606,640 @@
 </file>
 
 <file path=ppt/slides/slide7.xml><?xml version="1.0" encoding="utf-8"?>
+<p:sld xmlns:a="http://schemas.openxmlformats.org/drawingml/2006/main" xmlns:r="http://schemas.openxmlformats.org/officeDocument/2006/relationships" xmlns:p="http://schemas.openxmlformats.org/presentationml/2006/main">
+  <p:cSld>
+    <p:bg>
+      <p:bgPr>
+        <a:solidFill>
+          <a:srgbClr val="F9F5EE"/>
+        </a:solidFill>
+        <a:effectLst/>
+      </p:bgPr>
+    </p:bg>
+    <p:spTree>
+      <p:nvGrpSpPr>
+        <p:cNvPr id="1" name=""/>
+        <p:cNvGrpSpPr/>
+        <p:nvPr/>
+      </p:nvGrpSpPr>
+      <p:grpSpPr>
+        <a:xfrm>
+          <a:off x="0" y="0"/>
+          <a:ext cx="0" cy="0"/>
+          <a:chOff x="0" y="0"/>
+          <a:chExt cx="0" cy="0"/>
+        </a:xfrm>
+      </p:grpSpPr>
+      <p:sp>
+        <p:nvSpPr>
+          <p:cNvPr id="2" name="AF Star 2"/>
+          <p:cNvSpPr/>
+          <p:nvPr/>
+        </p:nvSpPr>
+        <p:spPr>
+          <a:xfrm>
+            <a:off x="10600000" y="1050000"/>
+            <a:ext cx="400000" cy="400000"/>
+          </a:xfrm>
+          <a:prstGeom prst="star4">
+            <a:avLst>
+              <a:gd name="adj" fmla="val 18000"/>
+            </a:avLst>
+          </a:prstGeom>
+          <a:solidFill>
+            <a:srgbClr val="000AFF">
+              <a:alpha val="13000"/>
+            </a:srgbClr>
+          </a:solidFill>
+          <a:ln>
+            <a:noFill/>
+          </a:ln>
+        </p:spPr>
+      </p:sp>
+      <p:sp>
+        <p:nvSpPr>
+          <p:cNvPr id="3" name="AF Star 3"/>
+          <p:cNvSpPr/>
+          <p:nvPr/>
+        </p:nvSpPr>
+        <p:spPr>
+          <a:xfrm>
+            <a:off x="9500000" y="4700000"/>
+            <a:ext cx="240000" cy="240000"/>
+          </a:xfrm>
+          <a:prstGeom prst="star4">
+            <a:avLst>
+              <a:gd name="adj" fmla="val 18000"/>
+            </a:avLst>
+          </a:prstGeom>
+          <a:solidFill>
+            <a:srgbClr val="FFC7AA">
+              <a:alpha val="26000"/>
+            </a:srgbClr>
+          </a:solidFill>
+          <a:ln>
+            <a:noFill/>
+          </a:ln>
+        </p:spPr>
+      </p:sp>
+      <p:sp>
+        <p:nvSpPr>
+          <p:cNvPr id="4" name="AF Ring 4"/>
+          <p:cNvSpPr/>
+          <p:nvPr/>
+        </p:nvSpPr>
+        <p:spPr>
+          <a:xfrm>
+            <a:off x="10500000" y="4900000"/>
+            <a:ext cx="2000000" cy="2000000"/>
+          </a:xfrm>
+          <a:prstGeom prst="ellipse">
+            <a:avLst/>
+          </a:prstGeom>
+          <a:noFill/>
+          <a:ln w="38100">
+            <a:solidFill>
+              <a:srgbClr val="000AFF">
+                <a:alpha val="12000"/>
+              </a:srgbClr>
+            </a:solidFill>
+          </a:ln>
+        </p:spPr>
+      </p:sp>
+      <p:sp>
+        <p:nvSpPr>
+          <p:cNvPr id="5" name="TextBox 5"/>
+          <p:cNvSpPr txBox="1"/>
+          <p:nvPr/>
+        </p:nvSpPr>
+        <p:spPr>
+          <a:xfrm>
+            <a:off x="640000" y="280000"/>
+            <a:ext cx="7200000" cy="420000"/>
+          </a:xfrm>
+          <a:prstGeom prst="rect">
+            <a:avLst/>
+          </a:prstGeom>
+          <a:noFill/>
+          <a:ln>
+            <a:noFill/>
+          </a:ln>
+        </p:spPr>
+        <p:txBody>
+          <a:bodyPr wrap="square" lIns="0" tIns="0" rIns="0" bIns="0"/>
+          <a:lstStyle/>
+          <a:p>
+            <a:pPr algn="l">
+              <a:lnSpc>
+                <a:spcPct val="120000"/>
+              </a:lnSpc>
+              <a:spcAft>
+                <a:spcPts val="400"/>
+              </a:spcAft>
+            </a:pPr>
+            <a:r>
+              <a:rPr lang="en-US" sz="1100" b="1" i="0" dirty="0">
+                <a:solidFill>
+                  <a:srgbClr val="000AFF"/>
+                </a:solidFill>
+                <a:latin typeface="JetBrains Mono"/>
+                <a:cs typeface="JetBrains Mono"/>
+              </a:rPr>
+              <a:t>ALTERNATE FUTURES  ·  06 · CONTAINER PORTABILITY &amp; FIRST-PARTY SECURITY</a:t>
+            </a:r>
+          </a:p>
+        </p:txBody>
+      </p:sp>
+      <p:sp>
+        <p:nvSpPr>
+          <p:cNvPr id="6" name="TextBox 6"/>
+          <p:cNvSpPr txBox="1"/>
+          <p:nvPr/>
+        </p:nvSpPr>
+        <p:spPr>
+          <a:xfrm>
+            <a:off x="8200000" y="260000"/>
+            <a:ext cx="3350000" cy="380000"/>
+          </a:xfrm>
+          <a:prstGeom prst="roundRect">
+            <a:avLst>
+              <a:gd name="adj" fmla="val 16000"/>
+            </a:avLst>
+          </a:prstGeom>
+          <a:solidFill>
+            <a:srgbClr val="000AFF"/>
+          </a:solidFill>
+          <a:ln>
+            <a:noFill/>
+          </a:ln>
+        </p:spPr>
+        <p:txBody>
+          <a:bodyPr wrap="square" lIns="110000" tIns="70000" rIns="110000" bIns="70000"/>
+          <a:lstStyle/>
+          <a:p>
+            <a:pPr algn="l">
+              <a:lnSpc>
+                <a:spcPct val="120000"/>
+              </a:lnSpc>
+              <a:spcAft>
+                <a:spcPts val="400"/>
+              </a:spcAft>
+            </a:pPr>
+            <a:r>
+              <a:rPr lang="en-US" sz="1000" b="1" i="0" dirty="0">
+                <a:solidFill>
+                  <a:srgbClr val="FFFFFF"/>
+                </a:solidFill>
+                <a:latin typeface="JetBrains Mono"/>
+                <a:cs typeface="JetBrains Mono"/>
+              </a:rPr>
+              <a:t>AMD-22 · ADR-010</a:t>
+            </a:r>
+          </a:p>
+        </p:txBody>
+      </p:sp>
+      <p:sp>
+        <p:nvSpPr>
+          <p:cNvPr id="7" name="Rect 7"/>
+          <p:cNvSpPr/>
+          <p:nvPr/>
+        </p:nvSpPr>
+        <p:spPr>
+          <a:xfrm>
+            <a:off x="640000" y="740000"/>
+            <a:ext cx="10912000" cy="12700"/>
+          </a:xfrm>
+          <a:prstGeom prst="rect">
+            <a:avLst/>
+          </a:prstGeom>
+          <a:solidFill>
+            <a:srgbClr val="000AFF">
+              <a:alpha val="22000"/>
+            </a:srgbClr>
+          </a:solidFill>
+          <a:ln>
+            <a:noFill/>
+          </a:ln>
+        </p:spPr>
+      </p:sp>
+      <p:sp>
+        <p:nvSpPr>
+          <p:cNvPr id="8" name="TextBox 8"/>
+          <p:cNvSpPr txBox="1"/>
+          <p:nvPr/>
+        </p:nvSpPr>
+        <p:spPr>
+          <a:xfrm>
+            <a:off x="640000" y="900000"/>
+            <a:ext cx="10900000" cy="1050000"/>
+          </a:xfrm>
+          <a:prstGeom prst="rect">
+            <a:avLst/>
+          </a:prstGeom>
+          <a:noFill/>
+          <a:ln>
+            <a:noFill/>
+          </a:ln>
+        </p:spPr>
+        <p:txBody>
+          <a:bodyPr wrap="square" lIns="0" tIns="0" rIns="0" bIns="0"/>
+          <a:lstStyle/>
+          <a:p>
+            <a:pPr algn="l">
+              <a:lnSpc>
+                <a:spcPct val="120000"/>
+              </a:lnSpc>
+              <a:spcAft>
+                <a:spcPts val="400"/>
+              </a:spcAft>
+            </a:pPr>
+            <a:r>
+              <a:rPr lang="en-US" sz="2600" b="1" i="0" dirty="0">
+                <a:solidFill>
+                  <a:srgbClr val="0000AF"/>
+                </a:solidFill>
+                <a:latin typeface="Instrument Sans"/>
+                <a:cs typeface="Instrument Sans"/>
+              </a:rPr>
+              <a:t>Solving Build-Time Next.js Rewrites for Portable Cloud Containers</a:t>
+            </a:r>
+          </a:p>
+          <a:p>
+            <a:pPr algn="l">
+              <a:lnSpc>
+                <a:spcPct val="120000"/>
+              </a:lnSpc>
+              <a:spcAft>
+                <a:spcPts val="400"/>
+              </a:spcAft>
+            </a:pPr>
+            <a:r>
+              <a:rPr lang="en-US" sz="1300" b="0" i="0" dirty="0">
+                <a:solidFill>
+                  <a:srgbClr val="1A1A1A"/>
+                </a:solidFill>
+                <a:latin typeface="Instrument Sans"/>
+                <a:cs typeface="Instrument Sans"/>
+              </a:rPr>
+              <a:t>Next.js evaluates next.config.ts rewrites() at build time. Because Clouds assigns service URLs at deploy time, apps/web/src/proxy.ts rewrites /api/v1/* dynamically at request time.</a:t>
+            </a:r>
+          </a:p>
+        </p:txBody>
+      </p:sp>
+      <p:sp>
+        <p:nvSpPr>
+          <p:cNvPr id="9" name="TextBox 9"/>
+          <p:cNvSpPr txBox="1"/>
+          <p:nvPr/>
+        </p:nvSpPr>
+        <p:spPr>
+          <a:xfrm>
+            <a:off x="640000" y="2050000"/>
+            <a:ext cx="5300000" cy="2550000"/>
+          </a:xfrm>
+          <a:prstGeom prst="roundRect">
+            <a:avLst>
+              <a:gd name="adj" fmla="val 8000"/>
+            </a:avLst>
+          </a:prstGeom>
+          <a:solidFill>
+            <a:srgbClr val="FFFFFF"/>
+          </a:solidFill>
+          <a:ln w="15875">
+            <a:solidFill>
+              <a:srgbClr val="000AFF"/>
+            </a:solidFill>
+          </a:ln>
+        </p:spPr>
+        <p:txBody>
+          <a:bodyPr wrap="square" lIns="140000" tIns="110000" rIns="140000" bIns="110000"/>
+          <a:lstStyle/>
+          <a:p>
+            <a:pPr algn="l">
+              <a:lnSpc>
+                <a:spcPct val="120000"/>
+              </a:lnSpc>
+              <a:spcAft>
+                <a:spcPts val="400"/>
+              </a:spcAft>
+            </a:pPr>
+            <a:r>
+              <a:rPr lang="en-US" sz="1000" b="1" i="0" dirty="0">
+                <a:solidFill>
+                  <a:srgbClr val="000AFF"/>
+                </a:solidFill>
+                <a:latin typeface="JetBrains Mono"/>
+                <a:cs typeface="JetBrains Mono"/>
+              </a:rPr>
+              <a:t>REQUEST-TIME PROXY (apps/web/src/proxy.ts)</a:t>
+            </a:r>
+          </a:p>
+          <a:p>
+            <a:pPr algn="l">
+              <a:lnSpc>
+                <a:spcPct val="120000"/>
+              </a:lnSpc>
+              <a:spcAft>
+                <a:spcPts val="400"/>
+              </a:spcAft>
+            </a:pPr>
+            <a:r>
+              <a:rPr lang="en-US" sz="1800" b="1" i="0" dirty="0">
+                <a:solidFill>
+                  <a:srgbClr val="0000AF"/>
+                </a:solidFill>
+                <a:latin typeface="Instrument Sans"/>
+                <a:cs typeface="Instrument Sans"/>
+              </a:rPr>
+              <a:t>Dynamic BACKEND_URL Resolution</a:t>
+            </a:r>
+          </a:p>
+          <a:p>
+            <a:pPr algn="l">
+              <a:lnSpc>
+                <a:spcPct val="120000"/>
+              </a:lnSpc>
+              <a:spcAft>
+                <a:spcPts val="400"/>
+              </a:spcAft>
+            </a:pPr>
+            <a:r>
+              <a:rPr lang="en-US" sz="1200" b="0" i="0" dirty="0">
+                <a:solidFill>
+                  <a:srgbClr val="1A1A1A"/>
+                </a:solidFill>
+                <a:latin typeface="Instrument Sans"/>
+                <a:cs typeface="Instrument Sans"/>
+              </a:rPr>
+              <a:t>• Intercepts /api/v1/:path* inside the Next.js server runtime.
+• Reads process.env.BACKEND_URL injected via acc services env set without rebuilding the container.
+• Generates per-request cryptographic CSP nonces on page routes.</a:t>
+            </a:r>
+          </a:p>
+        </p:txBody>
+      </p:sp>
+      <p:sp>
+        <p:nvSpPr>
+          <p:cNvPr id="10" name="TextBox 10"/>
+          <p:cNvSpPr txBox="1"/>
+          <p:nvPr/>
+        </p:nvSpPr>
+        <p:spPr>
+          <a:xfrm>
+            <a:off x="6220000" y="2050000"/>
+            <a:ext cx="5300000" cy="2550000"/>
+          </a:xfrm>
+          <a:prstGeom prst="roundRect">
+            <a:avLst>
+              <a:gd name="adj" fmla="val 8000"/>
+            </a:avLst>
+          </a:prstGeom>
+          <a:solidFill>
+            <a:srgbClr val="FFFFFF"/>
+          </a:solidFill>
+          <a:ln w="15875">
+            <a:solidFill>
+              <a:srgbClr val="000AFF"/>
+            </a:solidFill>
+          </a:ln>
+        </p:spPr>
+        <p:txBody>
+          <a:bodyPr wrap="square" lIns="140000" tIns="110000" rIns="140000" bIns="110000"/>
+          <a:lstStyle/>
+          <a:p>
+            <a:pPr algn="l">
+              <a:lnSpc>
+                <a:spcPct val="120000"/>
+              </a:lnSpc>
+              <a:spcAft>
+                <a:spcPts val="400"/>
+              </a:spcAft>
+            </a:pPr>
+            <a:r>
+              <a:rPr lang="en-US" sz="1000" b="1" i="0" dirty="0">
+                <a:solidFill>
+                  <a:srgbClr val="000AFF"/>
+                </a:solidFill>
+                <a:latin typeface="JetBrains Mono"/>
+                <a:cs typeface="JetBrains Mono"/>
+              </a:rPr>
+              <a:t>FIRST-PARTY HTTPS COOKIE CONTRACT</a:t>
+            </a:r>
+          </a:p>
+          <a:p>
+            <a:pPr algn="l">
+              <a:lnSpc>
+                <a:spcPct val="120000"/>
+              </a:lnSpc>
+              <a:spcAft>
+                <a:spcPts val="400"/>
+              </a:spcAft>
+            </a:pPr>
+            <a:r>
+              <a:rPr lang="en-US" sz="1800" b="1" i="0" dirty="0">
+                <a:solidFill>
+                  <a:srgbClr val="0000AF"/>
+                </a:solidFill>
+                <a:latin typeface="Instrument Sans"/>
+                <a:cs typeface="Instrument Sans"/>
+              </a:rPr>
+              <a:t>__Host- Cookies &amp; Signed Double-Submit CSRF</a:t>
+            </a:r>
+          </a:p>
+          <a:p>
+            <a:pPr algn="l">
+              <a:lnSpc>
+                <a:spcPct val="120000"/>
+              </a:lnSpc>
+              <a:spcAft>
+                <a:spcPts val="400"/>
+              </a:spcAft>
+            </a:pPr>
+            <a:r>
+              <a:rPr lang="en-US" sz="1200" b="0" i="0" dirty="0">
+                <a:solidFill>
+                  <a:srgbClr val="1A1A1A"/>
+                </a:solidFill>
+                <a:latin typeface="Instrument Sans"/>
+                <a:cs typeface="Instrument Sans"/>
+              </a:rPr>
+              <a:t>• Browser traffic stays 100% same-origin on https://root-web-app.alternatefutures.ai.
+• __Host-root_session (Secure; HttpOnly; SameSite=Lax; Path=/) &amp; __Host-root_csrf (SameSite=Strict).
+• Backend verifies Origin == FRONTEND_ORIGIN + HMAC-SHA256 CSRF token.</a:t>
+            </a:r>
+          </a:p>
+        </p:txBody>
+      </p:sp>
+      <p:sp>
+        <p:nvSpPr>
+          <p:cNvPr id="11" name="TextBox 11"/>
+          <p:cNvSpPr txBox="1"/>
+          <p:nvPr/>
+        </p:nvSpPr>
+        <p:spPr>
+          <a:xfrm>
+            <a:off x="640000" y="4800000"/>
+            <a:ext cx="10880000" cy="1350000"/>
+          </a:xfrm>
+          <a:prstGeom prst="roundRect">
+            <a:avLst>
+              <a:gd name="adj" fmla="val 8000"/>
+            </a:avLst>
+          </a:prstGeom>
+          <a:solidFill>
+            <a:srgbClr val="0A0A0A"/>
+          </a:solidFill>
+          <a:ln w="15875">
+            <a:solidFill>
+              <a:srgbClr val="A5B2FF"/>
+            </a:solidFill>
+          </a:ln>
+        </p:spPr>
+        <p:txBody>
+          <a:bodyPr wrap="square" lIns="140000" tIns="110000" rIns="140000" bIns="110000"/>
+          <a:lstStyle/>
+          <a:p>
+            <a:pPr algn="l">
+              <a:lnSpc>
+                <a:spcPct val="120000"/>
+              </a:lnSpc>
+              <a:spcAft>
+                <a:spcPts val="400"/>
+              </a:spcAft>
+            </a:pPr>
+            <a:r>
+              <a:rPr lang="en-US" sz="1000" b="1" i="0" dirty="0">
+                <a:solidFill>
+                  <a:srgbClr val="FFC7AA"/>
+                </a:solidFill>
+                <a:latin typeface="JetBrains Mono"/>
+                <a:cs typeface="JetBrains Mono"/>
+              </a:rPr>
+              <a:t>// apps/web/src/proxy.ts — Request-time /api/v1/* rewrite (AMD-22)</a:t>
+            </a:r>
+          </a:p>
+          <a:p>
+            <a:pPr algn="l">
+              <a:lnSpc>
+                <a:spcPct val="120000"/>
+              </a:lnSpc>
+              <a:spcAft>
+                <a:spcPts val="400"/>
+              </a:spcAft>
+            </a:pPr>
+            <a:r>
+              <a:rPr lang="en-US" sz="1100" b="0" i="0" dirty="0">
+                <a:solidFill>
+                  <a:srgbClr val="F9F5EE"/>
+                </a:solidFill>
+                <a:latin typeface="JetBrains Mono"/>
+                <a:cs typeface="JetBrains Mono"/>
+              </a:rPr>
+              <a:t>if (pathname.startsWith("/api/v1/")) {
+  const target = new URL(`${pathname}${request.nextUrl.search}`, backendOrigin());
+  return NextResponse.rewrite(target); // -&gt; https://root-api-app.alternatefutures.ai/api/v1/*
+}</a:t>
+            </a:r>
+          </a:p>
+        </p:txBody>
+      </p:sp>
+      <p:sp>
+        <p:nvSpPr>
+          <p:cNvPr id="12" name="TextBox 12"/>
+          <p:cNvSpPr txBox="1"/>
+          <p:nvPr/>
+        </p:nvSpPr>
+        <p:spPr>
+          <a:xfrm>
+            <a:off x="640000" y="6380000"/>
+            <a:ext cx="8200000" cy="320000"/>
+          </a:xfrm>
+          <a:prstGeom prst="rect">
+            <a:avLst/>
+          </a:prstGeom>
+          <a:noFill/>
+          <a:ln>
+            <a:noFill/>
+          </a:ln>
+        </p:spPr>
+        <p:txBody>
+          <a:bodyPr wrap="square" lIns="0" tIns="0" rIns="0" bIns="0"/>
+          <a:lstStyle/>
+          <a:p>
+            <a:pPr algn="l">
+              <a:lnSpc>
+                <a:spcPct val="120000"/>
+              </a:lnSpc>
+              <a:spcAft>
+                <a:spcPts val="400"/>
+              </a:spcAft>
+            </a:pPr>
+            <a:r>
+              <a:rPr lang="en-US" sz="900" b="0" i="0" dirty="0">
+                <a:solidFill>
+                  <a:srgbClr val="0000AF"/>
+                </a:solidFill>
+                <a:latin typeface="JetBrains Mono"/>
+                <a:cs typeface="JetBrains Mono"/>
+              </a:rPr>
+              <a:t>Biztective (ROOT 2.0)  ·  Phases 1–12  ·  Clouds by Alternate Futures  ·  https://root-web-app.alternatefutures.ai</a:t>
+            </a:r>
+          </a:p>
+        </p:txBody>
+      </p:sp>
+      <p:sp>
+        <p:nvSpPr>
+          <p:cNvPr id="13" name="TextBox 13"/>
+          <p:cNvSpPr txBox="1"/>
+          <p:nvPr/>
+        </p:nvSpPr>
+        <p:spPr>
+          <a:xfrm>
+            <a:off x="10400000" y="6380000"/>
+            <a:ext cx="1152000" cy="320000"/>
+          </a:xfrm>
+          <a:prstGeom prst="rect">
+            <a:avLst/>
+          </a:prstGeom>
+          <a:noFill/>
+          <a:ln>
+            <a:noFill/>
+          </a:ln>
+        </p:spPr>
+        <p:txBody>
+          <a:bodyPr wrap="square" lIns="0" tIns="0" rIns="0" bIns="0"/>
+          <a:lstStyle/>
+          <a:p>
+            <a:pPr algn="l">
+              <a:lnSpc>
+                <a:spcPct val="120000"/>
+              </a:lnSpc>
+              <a:spcAft>
+                <a:spcPts val="400"/>
+              </a:spcAft>
+            </a:pPr>
+            <a:r>
+              <a:rPr lang="en-US" sz="900" b="1" i="0" dirty="0">
+                <a:solidFill>
+                  <a:srgbClr val="0000AF"/>
+                </a:solidFill>
+                <a:latin typeface="JetBrains Mono"/>
+                <a:cs typeface="JetBrains Mono"/>
+              </a:rPr>
+              <a:t>SLIDE 07 / 11</a:t>
+            </a:r>
+          </a:p>
+        </p:txBody>
+      </p:sp>
+    </p:spTree>
+  </p:cSld>
+  <p:clrMapOvr>
+    <a:masterClrMapping/>
+  </p:clrMapOvr>
+</p:sld>
+</file>
+
+<file path=ppt/slides/slide8.xml><?xml version="1.0" encoding="utf-8"?>
 <p:sld xmlns:a="http://schemas.openxmlformats.org/drawingml/2006/main" xmlns:r="http://schemas.openxmlformats.org/officeDocument/2006/relationships" xmlns:p="http://schemas.openxmlformats.org/presentationml/2006/main">
   <p:cSld>
     <p:bg>
@@ -5047,7 +6375,7 @@
         <p:spPr>
           <a:xfrm>
             <a:off x="640000" y="280000"/>
-            <a:ext cx="6800000" cy="420000"/>
+            <a:ext cx="7200000" cy="420000"/>
           </a:xfrm>
           <a:prstGeom prst="rect">
             <a:avLst/>
@@ -5077,7 +6405,7 @@
                 <a:latin typeface="JetBrains Mono"/>
                 <a:cs typeface="JetBrains Mono"/>
               </a:rPr>
-              <a:t>ALTERNATE FUTURES  ·  06 · PHASE 10 TECHNICAL HARDENING AUDIT (AMD-21)</a:t>
+              <a:t>ALTERNATE FUTURES  ·  07 · PHASE 10 TECHNICAL HARDENING AUDIT (AMD-21)</a:t>
             </a:r>
           </a:p>
         </p:txBody>
@@ -5621,7 +6949,7 @@
         <p:spPr>
           <a:xfrm>
             <a:off x="640000" y="6380000"/>
-            <a:ext cx="8000000" cy="320000"/>
+            <a:ext cx="8200000" cy="320000"/>
           </a:xfrm>
           <a:prstGeom prst="rect">
             <a:avLst/>
@@ -5651,7 +6979,7 @@
                 <a:latin typeface="JetBrains Mono"/>
                 <a:cs typeface="JetBrains Mono"/>
               </a:rPr>
-              <a:t>Biztective (ROOT 2.0)  ·  Clouds by Alternate Futures  ·  https://root-web-app.alternatefutures.ai</a:t>
+              <a:t>Biztective (ROOT 2.0)  ·  Phases 1–12  ·  Clouds by Alternate Futures  ·  https://root-web-app.alternatefutures.ai</a:t>
             </a:r>
           </a:p>
         </p:txBody>
@@ -5695,773 +7023,7 @@
                 <a:latin typeface="JetBrains Mono"/>
                 <a:cs typeface="JetBrains Mono"/>
               </a:rPr>
-              <a:t>SLIDE 07 / 10</a:t>
-            </a:r>
-          </a:p>
-        </p:txBody>
-      </p:sp>
-    </p:spTree>
-  </p:cSld>
-  <p:clrMapOvr>
-    <a:masterClrMapping/>
-  </p:clrMapOvr>
-</p:sld>
-</file>
-
-<file path=ppt/slides/slide8.xml><?xml version="1.0" encoding="utf-8"?>
-<p:sld xmlns:a="http://schemas.openxmlformats.org/drawingml/2006/main" xmlns:r="http://schemas.openxmlformats.org/officeDocument/2006/relationships" xmlns:p="http://schemas.openxmlformats.org/presentationml/2006/main">
-  <p:cSld>
-    <p:bg>
-      <p:bgPr>
-        <a:solidFill>
-          <a:srgbClr val="F9F5EE"/>
-        </a:solidFill>
-        <a:effectLst/>
-      </p:bgPr>
-    </p:bg>
-    <p:spTree>
-      <p:nvGrpSpPr>
-        <p:cNvPr id="1" name=""/>
-        <p:cNvGrpSpPr/>
-        <p:nvPr/>
-      </p:nvGrpSpPr>
-      <p:grpSpPr>
-        <a:xfrm>
-          <a:off x="0" y="0"/>
-          <a:ext cx="0" cy="0"/>
-          <a:chOff x="0" y="0"/>
-          <a:chExt cx="0" cy="0"/>
-        </a:xfrm>
-      </p:grpSpPr>
-      <p:sp>
-        <p:nvSpPr>
-          <p:cNvPr id="2" name="AF Star 2"/>
-          <p:cNvSpPr/>
-          <p:nvPr/>
-        </p:nvSpPr>
-        <p:spPr>
-          <a:xfrm>
-            <a:off x="10600000" y="950000"/>
-            <a:ext cx="420000" cy="420000"/>
-          </a:xfrm>
-          <a:prstGeom prst="star4">
-            <a:avLst>
-              <a:gd name="adj" fmla="val 18000"/>
-            </a:avLst>
-          </a:prstGeom>
-          <a:solidFill>
-            <a:srgbClr val="000AFF">
-              <a:alpha val="13000"/>
-            </a:srgbClr>
-          </a:solidFill>
-          <a:ln>
-            <a:noFill/>
-          </a:ln>
-        </p:spPr>
-      </p:sp>
-      <p:sp>
-        <p:nvSpPr>
-          <p:cNvPr id="3" name="AF Star 3"/>
-          <p:cNvSpPr/>
-          <p:nvPr/>
-        </p:nvSpPr>
-        <p:spPr>
-          <a:xfrm>
-            <a:off x="9600000" y="1750000"/>
-            <a:ext cx="220000" cy="220000"/>
-          </a:xfrm>
-          <a:prstGeom prst="star4">
-            <a:avLst>
-              <a:gd name="adj" fmla="val 18000"/>
-            </a:avLst>
-          </a:prstGeom>
-          <a:solidFill>
-            <a:srgbClr val="FFC7AA">
-              <a:alpha val="26000"/>
-            </a:srgbClr>
-          </a:solidFill>
-          <a:ln>
-            <a:noFill/>
-          </a:ln>
-        </p:spPr>
-      </p:sp>
-      <p:sp>
-        <p:nvSpPr>
-          <p:cNvPr id="4" name="TextBox 4"/>
-          <p:cNvSpPr txBox="1"/>
-          <p:nvPr/>
-        </p:nvSpPr>
-        <p:spPr>
-          <a:xfrm>
-            <a:off x="640000" y="280000"/>
-            <a:ext cx="6800000" cy="420000"/>
-          </a:xfrm>
-          <a:prstGeom prst="rect">
-            <a:avLst/>
-          </a:prstGeom>
-          <a:noFill/>
-          <a:ln>
-            <a:noFill/>
-          </a:ln>
-        </p:spPr>
-        <p:txBody>
-          <a:bodyPr wrap="square" lIns="0" tIns="0" rIns="0" bIns="0"/>
-          <a:lstStyle/>
-          <a:p>
-            <a:pPr algn="l">
-              <a:lnSpc>
-                <a:spcPct val="120000"/>
-              </a:lnSpc>
-              <a:spcAft>
-                <a:spcPts val="400"/>
-              </a:spcAft>
-            </a:pPr>
-            <a:r>
-              <a:rPr lang="en-US" sz="1100" b="1" i="0" dirty="0">
-                <a:solidFill>
-                  <a:srgbClr val="000AFF"/>
-                </a:solidFill>
-                <a:latin typeface="JetBrains Mono"/>
-                <a:cs typeface="JetBrains Mono"/>
-              </a:rPr>
-              <a:t>ALTERNATE FUTURES  ·  07 · SOURCED BENCHMARKS &amp; QUALITY GATES</a:t>
-            </a:r>
-          </a:p>
-        </p:txBody>
-      </p:sp>
-      <p:sp>
-        <p:nvSpPr>
-          <p:cNvPr id="5" name="TextBox 5"/>
-          <p:cNvSpPr txBox="1"/>
-          <p:nvPr/>
-        </p:nvSpPr>
-        <p:spPr>
-          <a:xfrm>
-            <a:off x="8200000" y="260000"/>
-            <a:ext cx="3350000" cy="380000"/>
-          </a:xfrm>
-          <a:prstGeom prst="roundRect">
-            <a:avLst>
-              <a:gd name="adj" fmla="val 16000"/>
-            </a:avLst>
-          </a:prstGeom>
-          <a:solidFill>
-            <a:srgbClr val="000AFF"/>
-          </a:solidFill>
-          <a:ln>
-            <a:noFill/>
-          </a:ln>
-        </p:spPr>
-        <p:txBody>
-          <a:bodyPr wrap="square" lIns="110000" tIns="70000" rIns="110000" bIns="70000"/>
-          <a:lstStyle/>
-          <a:p>
-            <a:pPr algn="l">
-              <a:lnSpc>
-                <a:spcPct val="120000"/>
-              </a:lnSpc>
-              <a:spcAft>
-                <a:spcPts val="400"/>
-              </a:spcAft>
-            </a:pPr>
-            <a:r>
-              <a:rPr lang="en-US" sz="1000" b="1" i="0" dirty="0">
-                <a:solidFill>
-                  <a:srgbClr val="FFFFFF"/>
-                </a:solidFill>
-                <a:latin typeface="JetBrains Mono"/>
-                <a:cs typeface="JetBrains Mono"/>
-              </a:rPr>
-              <a:t>Zero Skipped Gates (R-5 / R-6)</a:t>
-            </a:r>
-          </a:p>
-        </p:txBody>
-      </p:sp>
-      <p:sp>
-        <p:nvSpPr>
-          <p:cNvPr id="6" name="Rect 6"/>
-          <p:cNvSpPr/>
-          <p:nvPr/>
-        </p:nvSpPr>
-        <p:spPr>
-          <a:xfrm>
-            <a:off x="640000" y="740000"/>
-            <a:ext cx="10912000" cy="12700"/>
-          </a:xfrm>
-          <a:prstGeom prst="rect">
-            <a:avLst/>
-          </a:prstGeom>
-          <a:solidFill>
-            <a:srgbClr val="000AFF">
-              <a:alpha val="22000"/>
-            </a:srgbClr>
-          </a:solidFill>
-          <a:ln>
-            <a:noFill/>
-          </a:ln>
-        </p:spPr>
-      </p:sp>
-      <p:sp>
-        <p:nvSpPr>
-          <p:cNvPr id="7" name="TextBox 7"/>
-          <p:cNvSpPr txBox="1"/>
-          <p:nvPr/>
-        </p:nvSpPr>
-        <p:spPr>
-          <a:xfrm>
-            <a:off x="640000" y="900000"/>
-            <a:ext cx="10900000" cy="650000"/>
-          </a:xfrm>
-          <a:prstGeom prst="rect">
-            <a:avLst/>
-          </a:prstGeom>
-          <a:noFill/>
-          <a:ln>
-            <a:noFill/>
-          </a:ln>
-        </p:spPr>
-        <p:txBody>
-          <a:bodyPr wrap="square" lIns="0" tIns="0" rIns="0" bIns="0"/>
-          <a:lstStyle/>
-          <a:p>
-            <a:pPr algn="l">
-              <a:lnSpc>
-                <a:spcPct val="120000"/>
-              </a:lnSpc>
-              <a:spcAft>
-                <a:spcPts val="400"/>
-              </a:spcAft>
-            </a:pPr>
-            <a:r>
-              <a:rPr lang="en-US" sz="2600" b="1" i="0" dirty="0">
-                <a:solidFill>
-                  <a:srgbClr val="0000AF"/>
-                </a:solidFill>
-                <a:latin typeface="Instrument Sans"/>
-                <a:cs typeface="Instrument Sans"/>
-              </a:rPr>
-              <a:t>Measured Performance &amp; Test Verification (2026-10-17)</a:t>
-            </a:r>
-          </a:p>
-        </p:txBody>
-      </p:sp>
-      <p:sp>
-        <p:nvSpPr>
-          <p:cNvPr id="8" name="TextBox 8"/>
-          <p:cNvSpPr txBox="1"/>
-          <p:nvPr/>
-        </p:nvSpPr>
-        <p:spPr>
-          <a:xfrm>
-            <a:off x="640000" y="1650000"/>
-            <a:ext cx="2600000" cy="2100000"/>
-          </a:xfrm>
-          <a:prstGeom prst="roundRect">
-            <a:avLst>
-              <a:gd name="adj" fmla="val 8000"/>
-            </a:avLst>
-          </a:prstGeom>
-          <a:solidFill>
-            <a:srgbClr val="FFFFFF"/>
-          </a:solidFill>
-          <a:ln w="15875">
-            <a:solidFill>
-              <a:srgbClr val="000AFF"/>
-            </a:solidFill>
-          </a:ln>
-        </p:spPr>
-        <p:txBody>
-          <a:bodyPr wrap="square" lIns="140000" tIns="110000" rIns="140000" bIns="110000"/>
-          <a:lstStyle/>
-          <a:p>
-            <a:pPr algn="l">
-              <a:lnSpc>
-                <a:spcPct val="120000"/>
-              </a:lnSpc>
-              <a:spcAft>
-                <a:spcPts val="400"/>
-              </a:spcAft>
-            </a:pPr>
-            <a:r>
-              <a:rPr lang="en-US" sz="2800" b="1" i="0" dirty="0">
-                <a:solidFill>
-                  <a:srgbClr val="000AFF"/>
-                </a:solidFill>
-                <a:latin typeface="Instrument Sans"/>
-                <a:cs typeface="Instrument Sans"/>
-              </a:rPr>
-              <a:t>50.37 s</a:t>
-            </a:r>
-          </a:p>
-          <a:p>
-            <a:pPr algn="l">
-              <a:lnSpc>
-                <a:spcPct val="120000"/>
-              </a:lnSpc>
-              <a:spcAft>
-                <a:spcPts val="400"/>
-              </a:spcAft>
-            </a:pPr>
-            <a:r>
-              <a:rPr lang="en-US" sz="900" b="1" i="0" dirty="0">
-                <a:solidFill>
-                  <a:srgbClr val="0000AF"/>
-                </a:solidFill>
-                <a:latin typeface="JetBrains Mono"/>
-                <a:cs typeface="JetBrains Mono"/>
-              </a:rPr>
-              <a:t>500K ROWS + 25K RETURNS INGEST</a:t>
-            </a:r>
-          </a:p>
-          <a:p>
-            <a:pPr algn="l">
-              <a:lnSpc>
-                <a:spcPct val="120000"/>
-              </a:lnSpc>
-              <a:spcAft>
-                <a:spcPts val="400"/>
-              </a:spcAft>
-            </a:pPr>
-            <a:r>
-              <a:rPr lang="en-US" sz="1100" b="0" i="0" dirty="0">
-                <a:solidFill>
-                  <a:srgbClr val="1A1A1A"/>
-                </a:solidFill>
-                <a:latin typeface="Instrument Sans"/>
-                <a:cs typeface="Instrument Sans"/>
-              </a:rPr>
-              <a:t>18.7 MB CSV upload + ingest (NFR-02 target &lt;= 120 s). 100k rows in 15.02 s.</a:t>
-            </a:r>
-          </a:p>
-        </p:txBody>
-      </p:sp>
-      <p:sp>
-        <p:nvSpPr>
-          <p:cNvPr id="9" name="TextBox 9"/>
-          <p:cNvSpPr txBox="1"/>
-          <p:nvPr/>
-        </p:nvSpPr>
-        <p:spPr>
-          <a:xfrm>
-            <a:off x="3400000" y="1650000"/>
-            <a:ext cx="2600000" cy="2100000"/>
-          </a:xfrm>
-          <a:prstGeom prst="roundRect">
-            <a:avLst>
-              <a:gd name="adj" fmla="val 8000"/>
-            </a:avLst>
-          </a:prstGeom>
-          <a:solidFill>
-            <a:srgbClr val="FFFFFF"/>
-          </a:solidFill>
-          <a:ln w="15875">
-            <a:solidFill>
-              <a:srgbClr val="000AFF"/>
-            </a:solidFill>
-          </a:ln>
-        </p:spPr>
-        <p:txBody>
-          <a:bodyPr wrap="square" lIns="140000" tIns="110000" rIns="140000" bIns="110000"/>
-          <a:lstStyle/>
-          <a:p>
-            <a:pPr algn="l">
-              <a:lnSpc>
-                <a:spcPct val="120000"/>
-              </a:lnSpc>
-              <a:spcAft>
-                <a:spcPts val="400"/>
-              </a:spcAft>
-            </a:pPr>
-            <a:r>
-              <a:rPr lang="en-US" sz="2800" b="1" i="0" dirty="0">
-                <a:solidFill>
-                  <a:srgbClr val="000AFF"/>
-                </a:solidFill>
-                <a:latin typeface="Instrument Sans"/>
-                <a:cs typeface="Instrument Sans"/>
-              </a:rPr>
-              <a:t>265 ms</a:t>
-            </a:r>
-          </a:p>
-          <a:p>
-            <a:pPr algn="l">
-              <a:lnSpc>
-                <a:spcPct val="120000"/>
-              </a:lnSpc>
-              <a:spcAft>
-                <a:spcPts val="400"/>
-              </a:spcAft>
-            </a:pPr>
-            <a:r>
-              <a:rPr lang="en-US" sz="900" b="1" i="0" dirty="0">
-                <a:solidFill>
-                  <a:srgbClr val="0000AF"/>
-                </a:solidFill>
-                <a:latin typeface="JetBrains Mono"/>
-                <a:cs typeface="JetBrains Mono"/>
-              </a:rPr>
-              <a:t>P95 CONCURRENT API READS</a:t>
-            </a:r>
-          </a:p>
-          <a:p>
-            <a:pPr algn="l">
-              <a:lnSpc>
-                <a:spcPct val="120000"/>
-              </a:lnSpc>
-              <a:spcAft>
-                <a:spcPts val="400"/>
-              </a:spcAft>
-            </a:pPr>
-            <a:r>
-              <a:rPr lang="en-US" sz="1100" b="0" i="0" dirty="0">
-                <a:solidFill>
-                  <a:srgbClr val="1A1A1A"/>
-                </a:solidFill>
-                <a:latin typeface="Instrument Sans"/>
-                <a:cs typeface="Instrument Sans"/>
-              </a:rPr>
-              <a:t>60 authenticated requests across 20 concurrent users (101.7 req/s; target &lt;= 300 ms).</a:t>
-            </a:r>
-          </a:p>
-        </p:txBody>
-      </p:sp>
-      <p:sp>
-        <p:nvSpPr>
-          <p:cNvPr id="10" name="TextBox 10"/>
-          <p:cNvSpPr txBox="1"/>
-          <p:nvPr/>
-        </p:nvSpPr>
-        <p:spPr>
-          <a:xfrm>
-            <a:off x="6160000" y="1650000"/>
-            <a:ext cx="2600000" cy="2100000"/>
-          </a:xfrm>
-          <a:prstGeom prst="roundRect">
-            <a:avLst>
-              <a:gd name="adj" fmla="val 8000"/>
-            </a:avLst>
-          </a:prstGeom>
-          <a:solidFill>
-            <a:srgbClr val="FFFFFF"/>
-          </a:solidFill>
-          <a:ln w="15875">
-            <a:solidFill>
-              <a:srgbClr val="000AFF"/>
-            </a:solidFill>
-          </a:ln>
-        </p:spPr>
-        <p:txBody>
-          <a:bodyPr wrap="square" lIns="140000" tIns="110000" rIns="140000" bIns="110000"/>
-          <a:lstStyle/>
-          <a:p>
-            <a:pPr algn="l">
-              <a:lnSpc>
-                <a:spcPct val="120000"/>
-              </a:lnSpc>
-              <a:spcAft>
-                <a:spcPts val="400"/>
-              </a:spcAft>
-            </a:pPr>
-            <a:r>
-              <a:rPr lang="en-US" sz="2800" b="1" i="0" dirty="0">
-                <a:solidFill>
-                  <a:srgbClr val="000AFF"/>
-                </a:solidFill>
-                <a:latin typeface="Instrument Sans"/>
-                <a:cs typeface="Instrument Sans"/>
-              </a:rPr>
-              <a:t>96.0%</a:t>
-            </a:r>
-          </a:p>
-          <a:p>
-            <a:pPr algn="l">
-              <a:lnSpc>
-                <a:spcPct val="120000"/>
-              </a:lnSpc>
-              <a:spcAft>
-                <a:spcPts val="400"/>
-              </a:spcAft>
-            </a:pPr>
-            <a:r>
-              <a:rPr lang="en-US" sz="900" b="1" i="0" dirty="0">
-                <a:solidFill>
-                  <a:srgbClr val="0000AF"/>
-                </a:solidFill>
-                <a:latin typeface="JetBrains Mono"/>
-                <a:cs typeface="JetBrains Mono"/>
-              </a:rPr>
-              <a:t>BACKEND COVERAGE (786 TESTS)</a:t>
-            </a:r>
-          </a:p>
-          <a:p>
-            <a:pPr algn="l">
-              <a:lnSpc>
-                <a:spcPct val="120000"/>
-              </a:lnSpc>
-              <a:spcAft>
-                <a:spcPts val="400"/>
-              </a:spcAft>
-            </a:pPr>
-            <a:r>
-              <a:rPr lang="en-US" sz="1100" b="0" i="0" dirty="0">
-                <a:solidFill>
-                  <a:srgbClr val="1A1A1A"/>
-                </a:solidFill>
-                <a:latin typeface="Instrument Sans"/>
-                <a:cs typeface="Instrument Sans"/>
-              </a:rPr>
-              <a:t>All 7 critical modules &gt;= 95% (auth 99%, critic 98%, verification 97%, analytics 96%).</a:t>
-            </a:r>
-          </a:p>
-        </p:txBody>
-      </p:sp>
-      <p:sp>
-        <p:nvSpPr>
-          <p:cNvPr id="11" name="TextBox 11"/>
-          <p:cNvSpPr txBox="1"/>
-          <p:nvPr/>
-        </p:nvSpPr>
-        <p:spPr>
-          <a:xfrm>
-            <a:off x="8920000" y="1650000"/>
-            <a:ext cx="2600000" cy="2100000"/>
-          </a:xfrm>
-          <a:prstGeom prst="roundRect">
-            <a:avLst>
-              <a:gd name="adj" fmla="val 8000"/>
-            </a:avLst>
-          </a:prstGeom>
-          <a:solidFill>
-            <a:srgbClr val="FFFFFF"/>
-          </a:solidFill>
-          <a:ln w="15875">
-            <a:solidFill>
-              <a:srgbClr val="000AFF"/>
-            </a:solidFill>
-          </a:ln>
-        </p:spPr>
-        <p:txBody>
-          <a:bodyPr wrap="square" lIns="140000" tIns="110000" rIns="140000" bIns="110000"/>
-          <a:lstStyle/>
-          <a:p>
-            <a:pPr algn="l">
-              <a:lnSpc>
-                <a:spcPct val="120000"/>
-              </a:lnSpc>
-              <a:spcAft>
-                <a:spcPts val="400"/>
-              </a:spcAft>
-            </a:pPr>
-            <a:r>
-              <a:rPr lang="en-US" sz="2800" b="1" i="0" dirty="0">
-                <a:solidFill>
-                  <a:srgbClr val="000AFF"/>
-                </a:solidFill>
-                <a:latin typeface="Instrument Sans"/>
-                <a:cs typeface="Instrument Sans"/>
-              </a:rPr>
-              <a:t>17 / 17</a:t>
-            </a:r>
-          </a:p>
-          <a:p>
-            <a:pPr algn="l">
-              <a:lnSpc>
-                <a:spcPct val="120000"/>
-              </a:lnSpc>
-              <a:spcAft>
-                <a:spcPts val="400"/>
-              </a:spcAft>
-            </a:pPr>
-            <a:r>
-              <a:rPr lang="en-US" sz="900" b="1" i="0" dirty="0">
-                <a:solidFill>
-                  <a:srgbClr val="0000AF"/>
-                </a:solidFill>
-                <a:latin typeface="JetBrains Mono"/>
-                <a:cs typeface="JetBrains Mono"/>
-              </a:rPr>
-              <a:t>PLAYWRIGHT E2E + AXE WCAG 2.2 AA</a:t>
-            </a:r>
-          </a:p>
-          <a:p>
-            <a:pPr algn="l">
-              <a:lnSpc>
-                <a:spcPct val="120000"/>
-              </a:lnSpc>
-              <a:spcAft>
-                <a:spcPts val="400"/>
-              </a:spcAft>
-            </a:pPr>
-            <a:r>
-              <a:rPr lang="en-US" sz="1100" b="0" i="0" dirty="0">
-                <a:solidFill>
-                  <a:srgbClr val="1A1A1A"/>
-                </a:solidFill>
-                <a:latin typeface="Instrument Sans"/>
-                <a:cs typeface="Instrument Sans"/>
-              </a:rPr>
-              <a:t>Full workflow, keyboard-only, mobile viewport, cross-tenant 404, plus 57 Vitest tests.</a:t>
-            </a:r>
-          </a:p>
-        </p:txBody>
-      </p:sp>
-      <p:sp>
-        <p:nvSpPr>
-          <p:cNvPr id="12" name="TextBox 12"/>
-          <p:cNvSpPr txBox="1"/>
-          <p:nvPr/>
-        </p:nvSpPr>
-        <p:spPr>
-          <a:xfrm>
-            <a:off x="640000" y="3950000"/>
-            <a:ext cx="10880000" cy="2200000"/>
-          </a:xfrm>
-          <a:prstGeom prst="roundRect">
-            <a:avLst>
-              <a:gd name="adj" fmla="val 8000"/>
-            </a:avLst>
-          </a:prstGeom>
-          <a:solidFill>
-            <a:srgbClr val="C8E0E4"/>
-          </a:solidFill>
-          <a:ln w="15875">
-            <a:solidFill>
-              <a:srgbClr val="0000AF"/>
-            </a:solidFill>
-          </a:ln>
-        </p:spPr>
-        <p:txBody>
-          <a:bodyPr wrap="square" lIns="140000" tIns="110000" rIns="140000" bIns="110000"/>
-          <a:lstStyle/>
-          <a:p>
-            <a:pPr algn="l">
-              <a:lnSpc>
-                <a:spcPct val="120000"/>
-              </a:lnSpc>
-              <a:spcAft>
-                <a:spcPts val="400"/>
-              </a:spcAft>
-            </a:pPr>
-            <a:r>
-              <a:rPr lang="en-US" sz="1100" b="1" i="0" dirty="0">
-                <a:solidFill>
-                  <a:srgbClr val="0000AF"/>
-                </a:solidFill>
-                <a:latin typeface="JetBrains Mono"/>
-                <a:cs typeface="JetBrains Mono"/>
-              </a:rPr>
-              <a:t>ADDITIONAL VERIFIED BENCHMARKS (docs/ROOT_ENGINEERING_LOG.md)</a:t>
-            </a:r>
-          </a:p>
-          <a:p>
-            <a:pPr algn="l">
-              <a:lnSpc>
-                <a:spcPct val="120000"/>
-              </a:lnSpc>
-              <a:spcAft>
-                <a:spcPts val="400"/>
-              </a:spcAft>
-            </a:pPr>
-            <a:r>
-              <a:rPr lang="en-US" sz="1200" b="0" i="0" dirty="0">
-                <a:solidFill>
-                  <a:srgbClr val="1A1A1A"/>
-                </a:solidFill>
-                <a:latin typeface="Instrument Sans"/>
-                <a:cs typeface="Instrument Sans"/>
-              </a:rPr>
-              <a:t>• 500k Analysis &amp; Anomaly Detection: 16.12 s (46 SQL statements, 35 anomaly flags; target &lt;= 60 s)
-• Investigation Start to First Question: 1.202–1.570 s (deterministic) / 1.070–2.076 s (LLM; target &lt;= 60 s)
-• Frontend Route Budgets (6 routes): TTFB 33–88 ms · Heading visible 275–591 ms · Transferred JS 152–273 KB (target &lt;= 400 KB)
-• Security &amp; Static Audits: 0 mypy --strict errors · 0 ruff findings · 0 prod pip-audit / npm audit CVEs · 0 gitleaks findings</a:t>
-            </a:r>
-          </a:p>
-        </p:txBody>
-      </p:sp>
-      <p:sp>
-        <p:nvSpPr>
-          <p:cNvPr id="13" name="TextBox 13"/>
-          <p:cNvSpPr txBox="1"/>
-          <p:nvPr/>
-        </p:nvSpPr>
-        <p:spPr>
-          <a:xfrm>
-            <a:off x="640000" y="6380000"/>
-            <a:ext cx="8000000" cy="320000"/>
-          </a:xfrm>
-          <a:prstGeom prst="rect">
-            <a:avLst/>
-          </a:prstGeom>
-          <a:noFill/>
-          <a:ln>
-            <a:noFill/>
-          </a:ln>
-        </p:spPr>
-        <p:txBody>
-          <a:bodyPr wrap="square" lIns="0" tIns="0" rIns="0" bIns="0"/>
-          <a:lstStyle/>
-          <a:p>
-            <a:pPr algn="l">
-              <a:lnSpc>
-                <a:spcPct val="120000"/>
-              </a:lnSpc>
-              <a:spcAft>
-                <a:spcPts val="400"/>
-              </a:spcAft>
-            </a:pPr>
-            <a:r>
-              <a:rPr lang="en-US" sz="900" b="0" i="0" dirty="0">
-                <a:solidFill>
-                  <a:srgbClr val="0000AF"/>
-                </a:solidFill>
-                <a:latin typeface="JetBrains Mono"/>
-                <a:cs typeface="JetBrains Mono"/>
-              </a:rPr>
-              <a:t>Biztective (ROOT 2.0)  ·  Clouds by Alternate Futures  ·  https://root-web-app.alternatefutures.ai</a:t>
-            </a:r>
-          </a:p>
-        </p:txBody>
-      </p:sp>
-      <p:sp>
-        <p:nvSpPr>
-          <p:cNvPr id="14" name="TextBox 14"/>
-          <p:cNvSpPr txBox="1"/>
-          <p:nvPr/>
-        </p:nvSpPr>
-        <p:spPr>
-          <a:xfrm>
-            <a:off x="10400000" y="6380000"/>
-            <a:ext cx="1152000" cy="320000"/>
-          </a:xfrm>
-          <a:prstGeom prst="rect">
-            <a:avLst/>
-          </a:prstGeom>
-          <a:noFill/>
-          <a:ln>
-            <a:noFill/>
-          </a:ln>
-        </p:spPr>
-        <p:txBody>
-          <a:bodyPr wrap="square" lIns="0" tIns="0" rIns="0" bIns="0"/>
-          <a:lstStyle/>
-          <a:p>
-            <a:pPr algn="l">
-              <a:lnSpc>
-                <a:spcPct val="120000"/>
-              </a:lnSpc>
-              <a:spcAft>
-                <a:spcPts val="400"/>
-              </a:spcAft>
-            </a:pPr>
-            <a:r>
-              <a:rPr lang="en-US" sz="900" b="1" i="0" dirty="0">
-                <a:solidFill>
-                  <a:srgbClr val="0000AF"/>
-                </a:solidFill>
-                <a:latin typeface="JetBrains Mono"/>
-                <a:cs typeface="JetBrains Mono"/>
-              </a:rPr>
-              <a:t>SLIDE 08 / 10</a:t>
+              <a:t>SLIDE 08 / 11</a:t>
             </a:r>
           </a:p>
         </p:txBody>
@@ -6507,7 +7069,7 @@
         </p:nvSpPr>
         <p:spPr>
           <a:xfrm>
-            <a:off x="10600000" y="1000000"/>
+            <a:off x="10600000" y="950000"/>
             <a:ext cx="420000" cy="420000"/>
           </a:xfrm>
           <a:prstGeom prst="star4">
@@ -6517,7 +7079,7 @@
           </a:prstGeom>
           <a:solidFill>
             <a:srgbClr val="000AFF">
-              <a:alpha val="12000"/>
+              <a:alpha val="13000"/>
             </a:srgbClr>
           </a:solidFill>
           <a:ln>
@@ -6533,7 +7095,7 @@
         </p:nvSpPr>
         <p:spPr>
           <a:xfrm>
-            <a:off x="9800000" y="4900000"/>
+            <a:off x="9600000" y="1750000"/>
             <a:ext cx="220000" cy="220000"/>
           </a:xfrm>
           <a:prstGeom prst="star4">
@@ -6542,8 +7104,8 @@
             </a:avLst>
           </a:prstGeom>
           <a:solidFill>
-            <a:srgbClr val="BE4200">
-              <a:alpha val="14000"/>
+            <a:srgbClr val="FFC7AA">
+              <a:alpha val="26000"/>
             </a:srgbClr>
           </a:solidFill>
           <a:ln>
@@ -6553,38 +7115,14 @@
       </p:sp>
       <p:sp>
         <p:nvSpPr>
-          <p:cNvPr id="4" name="AF Ring 4"/>
-          <p:cNvSpPr/>
-          <p:nvPr/>
-        </p:nvSpPr>
-        <p:spPr>
-          <a:xfrm>
-            <a:off x="-400000" y="4900000"/>
-            <a:ext cx="1800000" cy="1800000"/>
-          </a:xfrm>
-          <a:prstGeom prst="ellipse">
-            <a:avLst/>
-          </a:prstGeom>
-          <a:noFill/>
-          <a:ln w="38100">
-            <a:solidFill>
-              <a:srgbClr val="000AFF">
-                <a:alpha val="12000"/>
-              </a:srgbClr>
-            </a:solidFill>
-          </a:ln>
-        </p:spPr>
-      </p:sp>
-      <p:sp>
-        <p:nvSpPr>
-          <p:cNvPr id="5" name="TextBox 5"/>
+          <p:cNvPr id="4" name="TextBox 4"/>
           <p:cNvSpPr txBox="1"/>
           <p:nvPr/>
         </p:nvSpPr>
         <p:spPr>
           <a:xfrm>
             <a:off x="640000" y="280000"/>
-            <a:ext cx="6800000" cy="420000"/>
+            <a:ext cx="7200000" cy="420000"/>
           </a:xfrm>
           <a:prstGeom prst="rect">
             <a:avLst/>
@@ -6614,14 +7152,14 @@
                 <a:latin typeface="JetBrains Mono"/>
                 <a:cs typeface="JetBrains Mono"/>
               </a:rPr>
-              <a:t>ALTERNATE FUTURES  ·  08 · DAY-2 OPERATIONS WITH ACC &amp; KNOWN LIMITATIONS</a:t>
-            </a:r>
-          </a:p>
-        </p:txBody>
-      </p:sp>
-      <p:sp>
-        <p:nvSpPr>
-          <p:cNvPr id="6" name="TextBox 6"/>
+              <a:t>ALTERNATE FUTURES  ·  08 · SOURCED BENCHMARKS &amp; QUALITY GATES</a:t>
+            </a:r>
+          </a:p>
+        </p:txBody>
+      </p:sp>
+      <p:sp>
+        <p:nvSpPr>
+          <p:cNvPr id="5" name="TextBox 5"/>
           <p:cNvSpPr txBox="1"/>
           <p:nvPr/>
         </p:nvSpPr>
@@ -6662,14 +7200,14 @@
                 <a:latin typeface="JetBrains Mono"/>
                 <a:cs typeface="JetBrains Mono"/>
               </a:rPr>
-              <a:t>docs/DEPLOYMENT_GUIDE.md</a:t>
-            </a:r>
-          </a:p>
-        </p:txBody>
-      </p:sp>
-      <p:sp>
-        <p:nvSpPr>
-          <p:cNvPr id="7" name="Rect 7"/>
+              <a:t>Zero Skipped Gates (R-5 / R-6)</a:t>
+            </a:r>
+          </a:p>
+        </p:txBody>
+      </p:sp>
+      <p:sp>
+        <p:nvSpPr>
+          <p:cNvPr id="6" name="Rect 6"/>
           <p:cNvSpPr/>
           <p:nvPr/>
         </p:nvSpPr>
@@ -6693,114 +7231,58 @@
       </p:sp>
       <p:sp>
         <p:nvSpPr>
-          <p:cNvPr id="8" name="TextBox 8"/>
+          <p:cNvPr id="7" name="TextBox 7"/>
           <p:cNvSpPr txBox="1"/>
           <p:nvPr/>
         </p:nvSpPr>
         <p:spPr>
           <a:xfrm>
             <a:off x="640000" y="900000"/>
-            <a:ext cx="5300000" cy="5200000"/>
-          </a:xfrm>
-          <a:prstGeom prst="roundRect">
-            <a:avLst>
-              <a:gd name="adj" fmla="val 8000"/>
-            </a:avLst>
-          </a:prstGeom>
-          <a:solidFill>
-            <a:srgbClr val="0A0A0A"/>
-          </a:solidFill>
-          <a:ln w="15875">
-            <a:solidFill>
-              <a:srgbClr val="A5B2FF"/>
-            </a:solidFill>
-          </a:ln>
-        </p:spPr>
-        <p:txBody>
-          <a:bodyPr wrap="square" lIns="140000" tIns="110000" rIns="140000" bIns="110000"/>
-          <a:lstStyle/>
-          <a:p>
-            <a:pPr algn="l">
-              <a:lnSpc>
-                <a:spcPct val="120000"/>
-              </a:lnSpc>
-              <a:spcAft>
-                <a:spcPts val="400"/>
-              </a:spcAft>
-            </a:pPr>
-            <a:r>
-              <a:rPr lang="en-US" sz="1100" b="1" i="0" dirty="0">
-                <a:solidFill>
-                  <a:srgbClr val="FFC7AA"/>
-                </a:solidFill>
-                <a:latin typeface="JetBrains Mono"/>
-                <a:cs typeface="JetBrains Mono"/>
-              </a:rPr>
-              <a:t>REDEPLOY &amp; ROLLBACK WITH THE ACC CLI</a:t>
-            </a:r>
-          </a:p>
-          <a:p>
-            <a:pPr algn="l">
-              <a:lnSpc>
-                <a:spcPct val="120000"/>
-              </a:lnSpc>
-              <a:spcAft>
-                <a:spcPts val="400"/>
-              </a:spcAft>
-            </a:pPr>
-            <a:r>
-              <a:rPr lang="en-US" sz="1800" b="1" i="0" dirty="0">
-                <a:solidFill>
-                  <a:srgbClr val="F9F5EE"/>
+            <a:ext cx="10900000" cy="650000"/>
+          </a:xfrm>
+          <a:prstGeom prst="rect">
+            <a:avLst/>
+          </a:prstGeom>
+          <a:noFill/>
+          <a:ln>
+            <a:noFill/>
+          </a:ln>
+        </p:spPr>
+        <p:txBody>
+          <a:bodyPr wrap="square" lIns="0" tIns="0" rIns="0" bIns="0"/>
+          <a:lstStyle/>
+          <a:p>
+            <a:pPr algn="l">
+              <a:lnSpc>
+                <a:spcPct val="120000"/>
+              </a:lnSpc>
+              <a:spcAft>
+                <a:spcPts val="400"/>
+              </a:spcAft>
+            </a:pPr>
+            <a:r>
+              <a:rPr lang="en-US" sz="2600" b="1" i="0" dirty="0">
+                <a:solidFill>
+                  <a:srgbClr val="0000AF"/>
                 </a:solidFill>
                 <a:latin typeface="Instrument Sans"/>
                 <a:cs typeface="Instrument Sans"/>
               </a:rPr>
-              <a:t>Immutable Image Tags on Clouds</a:t>
-            </a:r>
-          </a:p>
-          <a:p>
-            <a:pPr algn="l">
-              <a:lnSpc>
-                <a:spcPct val="120000"/>
-              </a:lnSpc>
-              <a:spcAft>
-                <a:spcPts val="400"/>
-              </a:spcAft>
-            </a:pPr>
-            <a:r>
-              <a:rPr lang="en-US" sz="1100" b="0" i="0" dirty="0">
-                <a:solidFill>
-                  <a:srgbClr val="F9F5EE"/>
-                </a:solidFill>
-                <a:latin typeface="JetBrains Mono"/>
-                <a:cs typeface="JetBrains Mono"/>
-              </a:rPr>
-              <a:t># Clouds caches image tags on nodes &amp; rejects :latest/:main.
-# Bump version tag (e.g. 1.0.2 -&gt; 1.0.3) on every change:
-acc services deploy cmvbx1b1016uebs1u7l6ge6p7 \
-  --image ttl.sh/root2-mahateer-web-1.0.3:24h -y
-acc services deploy cmvbwfap014pibs1u7pxz2e5k \
-  --image ttl.sh/root2-mahateer-api-1.0.3:24h -y
-# View live structured JSON logs:
-acc services logs cmvbwfap014pibs1u7pxz2e5k
-# Instant rollback to previous known-good tag:
-acc services deploy cmvbwfap014pibs1u7pxz2e5k \
-  --image ttl.sh/root2-mahateer-api-1.0.2:24h -y</a:t>
-            </a:r>
-          </a:p>
-        </p:txBody>
-      </p:sp>
-      <p:sp>
-        <p:nvSpPr>
-          <p:cNvPr id="9" name="TextBox 9"/>
-          <p:cNvSpPr txBox="1"/>
-          <p:nvPr/>
-        </p:nvSpPr>
-        <p:spPr>
-          <a:xfrm>
-            <a:off x="6220000" y="900000"/>
-            <a:ext cx="5300000" cy="3350000"/>
+              <a:t>Measured Performance &amp; Test Verification Across Phases 1–12</a:t>
+            </a:r>
+          </a:p>
+        </p:txBody>
+      </p:sp>
+      <p:sp>
+        <p:nvSpPr>
+          <p:cNvPr id="8" name="TextBox 8"/>
+          <p:cNvSpPr txBox="1"/>
+          <p:nvPr/>
+        </p:nvSpPr>
+        <p:spPr>
+          <a:xfrm>
+            <a:off x="640000" y="1650000"/>
+            <a:ext cx="2600000" cy="2100000"/>
           </a:xfrm>
           <a:prstGeom prst="roundRect">
             <a:avLst>
@@ -6809,99 +7291,6 @@
           </a:prstGeom>
           <a:solidFill>
             <a:srgbClr val="FFFFFF"/>
-          </a:solidFill>
-          <a:ln w="15875">
-            <a:solidFill>
-              <a:srgbClr val="BE4200"/>
-            </a:solidFill>
-          </a:ln>
-        </p:spPr>
-        <p:txBody>
-          <a:bodyPr wrap="square" lIns="140000" tIns="110000" rIns="140000" bIns="110000"/>
-          <a:lstStyle/>
-          <a:p>
-            <a:pPr algn="l">
-              <a:lnSpc>
-                <a:spcPct val="120000"/>
-              </a:lnSpc>
-              <a:spcAft>
-                <a:spcPts val="400"/>
-              </a:spcAft>
-            </a:pPr>
-            <a:r>
-              <a:rPr lang="en-US" sz="1000" b="1" i="0" dirty="0">
-                <a:solidFill>
-                  <a:srgbClr val="BE4200"/>
-                </a:solidFill>
-                <a:latin typeface="JetBrains Mono"/>
-                <a:cs typeface="JetBrains Mono"/>
-              </a:rPr>
-              <a:t>TRANSPARENCY · KNOWN LIMITATIONS</a:t>
-            </a:r>
-          </a:p>
-          <a:p>
-            <a:pPr algn="l">
-              <a:lnSpc>
-                <a:spcPct val="120000"/>
-              </a:lnSpc>
-              <a:spcAft>
-                <a:spcPts val="400"/>
-              </a:spcAft>
-            </a:pPr>
-            <a:r>
-              <a:rPr lang="en-US" sz="1800" b="1" i="0" dirty="0">
-                <a:solidFill>
-                  <a:srgbClr val="0000AF"/>
-                </a:solidFill>
-                <a:latin typeface="Instrument Sans"/>
-                <a:cs typeface="Instrument Sans"/>
-              </a:rPr>
-              <a:t>Honest Engineering Boundaries</a:t>
-            </a:r>
-          </a:p>
-          <a:p>
-            <a:pPr algn="l">
-              <a:lnSpc>
-                <a:spcPct val="120000"/>
-              </a:lnSpc>
-              <a:spcAft>
-                <a:spcPts val="400"/>
-              </a:spcAft>
-            </a:pPr>
-            <a:r>
-              <a:rPr lang="en-US" sz="1200" b="0" i="0" dirty="0">
-                <a:solidFill>
-                  <a:srgbClr val="1A1A1A"/>
-                </a:solidFill>
-                <a:latin typeface="Instrument Sans"/>
-                <a:cs typeface="Instrument Sans"/>
-              </a:rPr>
-              <a:t>• Ephemeral OCI Registry (ttl.sh): 24h tags expire after 24 hours; trigger deploy-images.yml before redeploying after 24h.
-• Single-Instance Process State: SEC-20 session token buckets run in process memory (--workers 1) and reset on container restart.
-• Apps Script Redirect Latency: 2–19 s per call; bounded by 45 s timeouts and read-back reconciliation (AMD-20).
-• Scoped Exclusions (AMD-15/17/18): Data overlays, Slack webhooks, and self-registration UI remain deferred.</a:t>
-            </a:r>
-          </a:p>
-        </p:txBody>
-      </p:sp>
-      <p:sp>
-        <p:nvSpPr>
-          <p:cNvPr id="10" name="TextBox 10"/>
-          <p:cNvSpPr txBox="1"/>
-          <p:nvPr/>
-        </p:nvSpPr>
-        <p:spPr>
-          <a:xfrm>
-            <a:off x="6220000" y="4450000"/>
-            <a:ext cx="5300000" cy="1650000"/>
-          </a:xfrm>
-          <a:prstGeom prst="roundRect">
-            <a:avLst>
-              <a:gd name="adj" fmla="val 8000"/>
-            </a:avLst>
-          </a:prstGeom>
-          <a:solidFill>
-            <a:srgbClr val="C8E0E4"/>
           </a:solidFill>
           <a:ln w="15875">
             <a:solidFill>
@@ -6922,34 +7311,234 @@
               </a:spcAft>
             </a:pPr>
             <a:r>
-              <a:rPr lang="en-US" sz="1000" b="1" i="0" dirty="0">
-                <a:solidFill>
-                  <a:srgbClr val="0000AF"/>
-                </a:solidFill>
-                <a:latin typeface="JetBrains Mono"/>
-                <a:cs typeface="JetBrains Mono"/>
-              </a:rPr>
-              <a:t>SAFE SCHEMA ROLLBACK CONTRACT (R-14)</a:t>
-            </a:r>
-          </a:p>
-          <a:p>
-            <a:pPr algn="l">
-              <a:lnSpc>
-                <a:spcPct val="120000"/>
-              </a:lnSpc>
-              <a:spcAft>
-                <a:spcPts val="400"/>
-              </a:spcAft>
-            </a:pPr>
-            <a:r>
-              <a:rPr lang="en-US" sz="1200" b="0" i="0" dirty="0">
-                <a:solidFill>
-                  <a:srgbClr val="1A1A1A"/>
+              <a:rPr lang="en-US" sz="2800" b="1" i="0" dirty="0">
+                <a:solidFill>
+                  <a:srgbClr val="000AFF"/>
                 </a:solidFill>
                 <a:latin typeface="Instrument Sans"/>
                 <a:cs typeface="Instrument Sans"/>
               </a:rPr>
-              <a:t>Container image rollbacks do not auto-downgrade PostgreSQL. All Alembic migrations follow expand → migrate → contract so previous image tags stay compatible with the live schema.</a:t>
+              <a:t>50.37 s</a:t>
+            </a:r>
+          </a:p>
+          <a:p>
+            <a:pPr algn="l">
+              <a:lnSpc>
+                <a:spcPct val="120000"/>
+              </a:lnSpc>
+              <a:spcAft>
+                <a:spcPts val="400"/>
+              </a:spcAft>
+            </a:pPr>
+            <a:r>
+              <a:rPr lang="en-US" sz="900" b="1" i="0" dirty="0">
+                <a:solidFill>
+                  <a:srgbClr val="0000AF"/>
+                </a:solidFill>
+                <a:latin typeface="JetBrains Mono"/>
+                <a:cs typeface="JetBrains Mono"/>
+              </a:rPr>
+              <a:t>500K ROWS + 25K RETURNS INGEST</a:t>
+            </a:r>
+          </a:p>
+          <a:p>
+            <a:pPr algn="l">
+              <a:lnSpc>
+                <a:spcPct val="120000"/>
+              </a:lnSpc>
+              <a:spcAft>
+                <a:spcPts val="400"/>
+              </a:spcAft>
+            </a:pPr>
+            <a:r>
+              <a:rPr lang="en-US" sz="1100" b="0" i="0" dirty="0">
+                <a:solidFill>
+                  <a:srgbClr val="1A1A1A"/>
+                </a:solidFill>
+                <a:latin typeface="Instrument Sans"/>
+                <a:cs typeface="Instrument Sans"/>
+              </a:rPr>
+              <a:t>18.7 MB CSV upload + ingest (NFR-02 target &lt;= 120 s). 100k rows in 15.02 s.</a:t>
+            </a:r>
+          </a:p>
+        </p:txBody>
+      </p:sp>
+      <p:sp>
+        <p:nvSpPr>
+          <p:cNvPr id="9" name="TextBox 9"/>
+          <p:cNvSpPr txBox="1"/>
+          <p:nvPr/>
+        </p:nvSpPr>
+        <p:spPr>
+          <a:xfrm>
+            <a:off x="3400000" y="1650000"/>
+            <a:ext cx="2600000" cy="2100000"/>
+          </a:xfrm>
+          <a:prstGeom prst="roundRect">
+            <a:avLst>
+              <a:gd name="adj" fmla="val 8000"/>
+            </a:avLst>
+          </a:prstGeom>
+          <a:solidFill>
+            <a:srgbClr val="FFFFFF"/>
+          </a:solidFill>
+          <a:ln w="15875">
+            <a:solidFill>
+              <a:srgbClr val="000AFF"/>
+            </a:solidFill>
+          </a:ln>
+        </p:spPr>
+        <p:txBody>
+          <a:bodyPr wrap="square" lIns="140000" tIns="110000" rIns="140000" bIns="110000"/>
+          <a:lstStyle/>
+          <a:p>
+            <a:pPr algn="l">
+              <a:lnSpc>
+                <a:spcPct val="120000"/>
+              </a:lnSpc>
+              <a:spcAft>
+                <a:spcPts val="400"/>
+              </a:spcAft>
+            </a:pPr>
+            <a:r>
+              <a:rPr lang="en-US" sz="2800" b="1" i="0" dirty="0">
+                <a:solidFill>
+                  <a:srgbClr val="000AFF"/>
+                </a:solidFill>
+                <a:latin typeface="Instrument Sans"/>
+                <a:cs typeface="Instrument Sans"/>
+              </a:rPr>
+              <a:t>265 ms</a:t>
+            </a:r>
+          </a:p>
+          <a:p>
+            <a:pPr algn="l">
+              <a:lnSpc>
+                <a:spcPct val="120000"/>
+              </a:lnSpc>
+              <a:spcAft>
+                <a:spcPts val="400"/>
+              </a:spcAft>
+            </a:pPr>
+            <a:r>
+              <a:rPr lang="en-US" sz="900" b="1" i="0" dirty="0">
+                <a:solidFill>
+                  <a:srgbClr val="0000AF"/>
+                </a:solidFill>
+                <a:latin typeface="JetBrains Mono"/>
+                <a:cs typeface="JetBrains Mono"/>
+              </a:rPr>
+              <a:t>P95 CONCURRENT API READS</a:t>
+            </a:r>
+          </a:p>
+          <a:p>
+            <a:pPr algn="l">
+              <a:lnSpc>
+                <a:spcPct val="120000"/>
+              </a:lnSpc>
+              <a:spcAft>
+                <a:spcPts val="400"/>
+              </a:spcAft>
+            </a:pPr>
+            <a:r>
+              <a:rPr lang="en-US" sz="1100" b="0" i="0" dirty="0">
+                <a:solidFill>
+                  <a:srgbClr val="1A1A1A"/>
+                </a:solidFill>
+                <a:latin typeface="Instrument Sans"/>
+                <a:cs typeface="Instrument Sans"/>
+              </a:rPr>
+              <a:t>60 authenticated requests across 20 concurrent users (101.7 req/s; target &lt;= 300 ms).</a:t>
+            </a:r>
+          </a:p>
+        </p:txBody>
+      </p:sp>
+      <p:sp>
+        <p:nvSpPr>
+          <p:cNvPr id="10" name="TextBox 10"/>
+          <p:cNvSpPr txBox="1"/>
+          <p:nvPr/>
+        </p:nvSpPr>
+        <p:spPr>
+          <a:xfrm>
+            <a:off x="6160000" y="1650000"/>
+            <a:ext cx="2600000" cy="2100000"/>
+          </a:xfrm>
+          <a:prstGeom prst="roundRect">
+            <a:avLst>
+              <a:gd name="adj" fmla="val 8000"/>
+            </a:avLst>
+          </a:prstGeom>
+          <a:solidFill>
+            <a:srgbClr val="FFFFFF"/>
+          </a:solidFill>
+          <a:ln w="15875">
+            <a:solidFill>
+              <a:srgbClr val="000AFF"/>
+            </a:solidFill>
+          </a:ln>
+        </p:spPr>
+        <p:txBody>
+          <a:bodyPr wrap="square" lIns="140000" tIns="110000" rIns="140000" bIns="110000"/>
+          <a:lstStyle/>
+          <a:p>
+            <a:pPr algn="l">
+              <a:lnSpc>
+                <a:spcPct val="120000"/>
+              </a:lnSpc>
+              <a:spcAft>
+                <a:spcPts val="400"/>
+              </a:spcAft>
+            </a:pPr>
+            <a:r>
+              <a:rPr lang="en-US" sz="2800" b="1" i="0" dirty="0">
+                <a:solidFill>
+                  <a:srgbClr val="000AFF"/>
+                </a:solidFill>
+                <a:latin typeface="Instrument Sans"/>
+                <a:cs typeface="Instrument Sans"/>
+              </a:rPr>
+              <a:t>96.0%</a:t>
+            </a:r>
+          </a:p>
+          <a:p>
+            <a:pPr algn="l">
+              <a:lnSpc>
+                <a:spcPct val="120000"/>
+              </a:lnSpc>
+              <a:spcAft>
+                <a:spcPts val="400"/>
+              </a:spcAft>
+            </a:pPr>
+            <a:r>
+              <a:rPr lang="en-US" sz="900" b="1" i="0" dirty="0">
+                <a:solidFill>
+                  <a:srgbClr val="0000AF"/>
+                </a:solidFill>
+                <a:latin typeface="JetBrains Mono"/>
+                <a:cs typeface="JetBrains Mono"/>
+              </a:rPr>
+              <a:t>BACKEND COVERAGE + 22 DB TESTS</a:t>
+            </a:r>
+          </a:p>
+          <a:p>
+            <a:pPr algn="l">
+              <a:lnSpc>
+                <a:spcPct val="120000"/>
+              </a:lnSpc>
+              <a:spcAft>
+                <a:spcPts val="400"/>
+              </a:spcAft>
+            </a:pPr>
+            <a:r>
+              <a:rPr lang="en-US" sz="1100" b="0" i="0" dirty="0">
+                <a:solidFill>
+                  <a:srgbClr val="1A1A1A"/>
+                </a:solidFill>
+                <a:latin typeface="Instrument Sans"/>
+                <a:cs typeface="Instrument Sans"/>
+              </a:rPr>
+              <a:t>786 core + 22 Phase 12 connector tests; all 7 critical modules &gt;= 95%.</a:t>
             </a:r>
           </a:p>
         </p:txBody>
@@ -6962,8 +7551,171 @@
         </p:nvSpPr>
         <p:spPr>
           <a:xfrm>
+            <a:off x="8920000" y="1650000"/>
+            <a:ext cx="2600000" cy="2100000"/>
+          </a:xfrm>
+          <a:prstGeom prst="roundRect">
+            <a:avLst>
+              <a:gd name="adj" fmla="val 8000"/>
+            </a:avLst>
+          </a:prstGeom>
+          <a:solidFill>
+            <a:srgbClr val="FFFFFF"/>
+          </a:solidFill>
+          <a:ln w="15875">
+            <a:solidFill>
+              <a:srgbClr val="000AFF"/>
+            </a:solidFill>
+          </a:ln>
+        </p:spPr>
+        <p:txBody>
+          <a:bodyPr wrap="square" lIns="140000" tIns="110000" rIns="140000" bIns="110000"/>
+          <a:lstStyle/>
+          <a:p>
+            <a:pPr algn="l">
+              <a:lnSpc>
+                <a:spcPct val="120000"/>
+              </a:lnSpc>
+              <a:spcAft>
+                <a:spcPts val="400"/>
+              </a:spcAft>
+            </a:pPr>
+            <a:r>
+              <a:rPr lang="en-US" sz="2800" b="1" i="0" dirty="0">
+                <a:solidFill>
+                  <a:srgbClr val="000AFF"/>
+                </a:solidFill>
+                <a:latin typeface="Instrument Sans"/>
+                <a:cs typeface="Instrument Sans"/>
+              </a:rPr>
+              <a:t>67 + 17</a:t>
+            </a:r>
+          </a:p>
+          <a:p>
+            <a:pPr algn="l">
+              <a:lnSpc>
+                <a:spcPct val="120000"/>
+              </a:lnSpc>
+              <a:spcAft>
+                <a:spcPts val="400"/>
+              </a:spcAft>
+            </a:pPr>
+            <a:r>
+              <a:rPr lang="en-US" sz="900" b="1" i="0" dirty="0">
+                <a:solidFill>
+                  <a:srgbClr val="0000AF"/>
+                </a:solidFill>
+                <a:latin typeface="JetBrains Mono"/>
+                <a:cs typeface="JetBrains Mono"/>
+              </a:rPr>
+              <a:t>VITEST UNIT + PLAYWRIGHT E2E</a:t>
+            </a:r>
+          </a:p>
+          <a:p>
+            <a:pPr algn="l">
+              <a:lnSpc>
+                <a:spcPct val="120000"/>
+              </a:lnSpc>
+              <a:spcAft>
+                <a:spcPts val="400"/>
+              </a:spcAft>
+            </a:pPr>
+            <a:r>
+              <a:rPr lang="en-US" sz="1100" b="0" i="0" dirty="0">
+                <a:solidFill>
+                  <a:srgbClr val="1A1A1A"/>
+                </a:solidFill>
+                <a:latin typeface="Instrument Sans"/>
+                <a:cs typeface="Instrument Sans"/>
+              </a:rPr>
+              <a:t>67 Vitest tests (incl. Postgres connect UI) + 17 Playwright E2E + axe WCAG 2.2 AA.</a:t>
+            </a:r>
+          </a:p>
+        </p:txBody>
+      </p:sp>
+      <p:sp>
+        <p:nvSpPr>
+          <p:cNvPr id="12" name="TextBox 12"/>
+          <p:cNvSpPr txBox="1"/>
+          <p:nvPr/>
+        </p:nvSpPr>
+        <p:spPr>
+          <a:xfrm>
+            <a:off x="640000" y="3950000"/>
+            <a:ext cx="10880000" cy="2200000"/>
+          </a:xfrm>
+          <a:prstGeom prst="roundRect">
+            <a:avLst>
+              <a:gd name="adj" fmla="val 8000"/>
+            </a:avLst>
+          </a:prstGeom>
+          <a:solidFill>
+            <a:srgbClr val="C8E0E4"/>
+          </a:solidFill>
+          <a:ln w="15875">
+            <a:solidFill>
+              <a:srgbClr val="0000AF"/>
+            </a:solidFill>
+          </a:ln>
+        </p:spPr>
+        <p:txBody>
+          <a:bodyPr wrap="square" lIns="140000" tIns="110000" rIns="140000" bIns="110000"/>
+          <a:lstStyle/>
+          <a:p>
+            <a:pPr algn="l">
+              <a:lnSpc>
+                <a:spcPct val="120000"/>
+              </a:lnSpc>
+              <a:spcAft>
+                <a:spcPts val="400"/>
+              </a:spcAft>
+            </a:pPr>
+            <a:r>
+              <a:rPr lang="en-US" sz="1100" b="1" i="0" dirty="0">
+                <a:solidFill>
+                  <a:srgbClr val="0000AF"/>
+                </a:solidFill>
+                <a:latin typeface="JetBrains Mono"/>
+                <a:cs typeface="JetBrains Mono"/>
+              </a:rPr>
+              <a:t>ADDITIONAL VERIFIED BENCHMARKS (docs/ROOT_ENGINEERING_LOG.md)</a:t>
+            </a:r>
+          </a:p>
+          <a:p>
+            <a:pPr algn="l">
+              <a:lnSpc>
+                <a:spcPct val="120000"/>
+              </a:lnSpc>
+              <a:spcAft>
+                <a:spcPts val="400"/>
+              </a:spcAft>
+            </a:pPr>
+            <a:r>
+              <a:rPr lang="en-US" sz="1200" b="0" i="0" dirty="0">
+                <a:solidFill>
+                  <a:srgbClr val="1A1A1A"/>
+                </a:solidFill>
+                <a:latin typeface="Instrument Sans"/>
+                <a:cs typeface="Instrument Sans"/>
+              </a:rPr>
+              <a:t>• 500k Analysis &amp; Anomaly Detection: 16.12 s (46 SQL statements, 35 anomaly flags; target &lt;= 60 s)
+• Investigation Start to First Question: 1.202–1.570 s (deterministic) / 1.070–2.076 s (LLM; target &lt;= 60 s)
+• Phase 12 Dual-Source Equivalence: Local Postgres sync vs CSV upload yields 100% identical weekly metrics; Supabase TLS verify-full extracts 17,377 orders + 1,500 customers + 120 products + 811 returns
+• Security &amp; Static Audits: 0 mypy --strict errors (166 files) · 0 ruff findings · 0 prod CVEs · 0 gitleaks findings</a:t>
+            </a:r>
+          </a:p>
+        </p:txBody>
+      </p:sp>
+      <p:sp>
+        <p:nvSpPr>
+          <p:cNvPr id="13" name="TextBox 13"/>
+          <p:cNvSpPr txBox="1"/>
+          <p:nvPr/>
+        </p:nvSpPr>
+        <p:spPr>
+          <a:xfrm>
             <a:off x="640000" y="6380000"/>
-            <a:ext cx="8000000" cy="320000"/>
+            <a:ext cx="8200000" cy="320000"/>
           </a:xfrm>
           <a:prstGeom prst="rect">
             <a:avLst/>
@@ -6993,14 +7745,14 @@
                 <a:latin typeface="JetBrains Mono"/>
                 <a:cs typeface="JetBrains Mono"/>
               </a:rPr>
-              <a:t>Biztective (ROOT 2.0)  ·  Clouds by Alternate Futures  ·  https://root-web-app.alternatefutures.ai</a:t>
-            </a:r>
-          </a:p>
-        </p:txBody>
-      </p:sp>
-      <p:sp>
-        <p:nvSpPr>
-          <p:cNvPr id="12" name="TextBox 12"/>
+              <a:t>Biztective (ROOT 2.0)  ·  Phases 1–12  ·  Clouds by Alternate Futures  ·  https://root-web-app.alternatefutures.ai</a:t>
+            </a:r>
+          </a:p>
+        </p:txBody>
+      </p:sp>
+      <p:sp>
+        <p:nvSpPr>
+          <p:cNvPr id="14" name="TextBox 14"/>
           <p:cNvSpPr txBox="1"/>
           <p:nvPr/>
         </p:nvSpPr>
@@ -7037,7 +7789,7 @@
                 <a:latin typeface="JetBrains Mono"/>
                 <a:cs typeface="JetBrains Mono"/>
               </a:rPr>
-              <a:t>SLIDE 09 / 10</a:t>
+              <a:t>SLIDE 09 / 11</a:t>
             </a:r>
           </a:p>
         </p:txBody>
